--- a/slides/modules/m25-ai-assisted-development.pptx
+++ b/slides/modules/m25-ai-assisted-development.pptx
@@ -13,6 +13,7 @@
     <p:sldId id="261" r:id="rId13"/>
     <p:sldId id="262" r:id="rId14"/>
     <p:sldId id="263" r:id="rId15"/>
+    <p:sldId id="264" r:id="rId16"/>
   </p:sldIdLst>
   <p:sldSz cx="12191695" cy="6858000" type="screen4x3"/>
   <p:notesSz cx="6858000" cy="9144000"/>
@@ -930,6 +931,76 @@
           <a:p>
             <a:r>
               <a:t>Land the plane on where this fits and what to take home. The neutral client in the lab was deliberately generic so the lesson is about the platform boundary, not one product — but in practice Red Hat ships a Lightspeed family: OpenShift Lightspeed (GA) for the cluster console, which can itself act as an MCP host; Developer Lightspeed for Red Hat Developer Hub [ADS] (Developer Preview) for non-coding developer questions in the portal; and Developer Lightspeed for MTA [ADS] (GA) for in-IDE Java modernization. They differ in surface and job, but they share this module's spine: an assistant is only as powerful as the identity it acts through, and every one is governed by the same RBAC the attendee just scoped by hand. Then the takeaway — a team policy checklist, every line performed today: read-only first; the identity's RBAC is the boundary, the read-only flag is a seatbelt; namespace allowlists, never cluster-wide; no secrets by default; writes are a reviewed, per-task human grant; every action auditable via the tool-call trace and managedFields; bound, short-lived tokens. Close on the line: your agent is a junior engineer with root, unless you stop it — so you scope it with RBAC, not trust.</a:t>
+            </a:r>
+          </a:p>
+        </p:txBody>
+      </p:sp>
+      <p:sp>
+        <p:nvSpPr>
+          <p:cNvPr id="4" name="Slide Number Placeholder 3"/>
+          <p:cNvSpPr>
+            <a:spLocks noGrp="1"/>
+          </p:cNvSpPr>
+          <p:nvPr>
+            <p:ph type="sldNum" idx="5" sz="quarter"/>
+          </p:nvPr>
+        </p:nvSpPr>
+        <p:spPr/>
+      </p:sp>
+    </p:spTree>
+  </p:cSld>
+  <p:clrMapOvr>
+    <a:masterClrMapping/>
+  </p:clrMapOvr>
+</p:notes>
+</file>
+
+<file path=ppt/notesSlides/notesSlide8.xml><?xml version="1.0" encoding="utf-8"?>
+<p:notes xmlns:a="http://schemas.openxmlformats.org/drawingml/2006/main" xmlns:p="http://schemas.openxmlformats.org/presentationml/2006/main" xmlns:r="http://schemas.openxmlformats.org/officeDocument/2006/relationships">
+  <p:cSld>
+    <p:spTree>
+      <p:nvGrpSpPr>
+        <p:cNvPr id="1" name=""/>
+        <p:cNvGrpSpPr/>
+        <p:nvPr/>
+      </p:nvGrpSpPr>
+      <p:grpSpPr>
+        <a:xfrm>
+          <a:off x="0" y="0"/>
+          <a:ext cx="0" cy="0"/>
+          <a:chOff x="0" y="0"/>
+          <a:chExt cx="0" cy="0"/>
+        </a:xfrm>
+      </p:grpSpPr>
+      <p:sp>
+        <p:nvSpPr>
+          <p:cNvPr id="2" name="Slide Image Placeholder 1"/>
+          <p:cNvSpPr>
+            <a:spLocks noGrp="1"/>
+          </p:cNvSpPr>
+          <p:nvPr>
+            <p:ph type="sldImg" idx="2"/>
+          </p:nvPr>
+        </p:nvSpPr>
+        <p:spPr/>
+      </p:sp>
+      <p:sp>
+        <p:nvSpPr>
+          <p:cNvPr id="3" name="Notes Placeholder 2"/>
+          <p:cNvSpPr>
+            <a:spLocks noGrp="1"/>
+          </p:cNvSpPr>
+          <p:nvPr>
+            <p:ph type="body" idx="3" sz="quarter"/>
+          </p:nvPr>
+        </p:nvSpPr>
+        <p:spPr/>
+        <p:txBody>
+          <a:bodyPr/>
+          <a:lstStyle/>
+          <a:p>
+            <a:r>
+              <a:t>Concept diagram: What you built.</a:t>
             </a:r>
           </a:p>
         </p:txBody>
@@ -4352,11 +4423,11 @@
         <p:spPr>
           <a:xfrm>
             <a:off x="841248" y="2395728"/>
-            <a:ext cx="5715000" cy="530352"/>
+            <a:ext cx="5138928" cy="786384"/>
           </a:xfrm>
           <a:prstGeom prst="roundRect">
             <a:avLst>
-              <a:gd name="adj" fmla="val 6000"/>
+              <a:gd name="adj" fmla="val 7000"/>
             </a:avLst>
           </a:prstGeom>
           <a:solidFill>
@@ -4391,9 +4462,55 @@
           </a:p>
         </p:txBody>
       </p:sp>
+      <p:sp>
+        <p:nvSpPr>
+          <p:cNvPr id="7" name="Rounded Rectangle 6"/>
+          <p:cNvSpPr/>
+          <p:nvPr/>
+        </p:nvSpPr>
+        <p:spPr>
+          <a:xfrm>
+            <a:off x="987552" y="2532888"/>
+            <a:ext cx="512064" cy="512064"/>
+          </a:xfrm>
+          <a:prstGeom prst="roundRect">
+            <a:avLst>
+              <a:gd name="adj" fmla="val 26000"/>
+            </a:avLst>
+          </a:prstGeom>
+          <a:solidFill>
+            <a:srgbClr val="EE0000"/>
+          </a:solidFill>
+          <a:ln>
+            <a:noFill/>
+          </a:ln>
+          <a:effectLst/>
+        </p:spPr>
+        <p:style>
+          <a:lnRef idx="1">
+            <a:schemeClr val="accent1"/>
+          </a:lnRef>
+          <a:fillRef idx="3">
+            <a:schemeClr val="accent1"/>
+          </a:fillRef>
+          <a:effectRef idx="2">
+            <a:schemeClr val="accent1"/>
+          </a:effectRef>
+          <a:fontRef idx="minor">
+            <a:schemeClr val="lt1"/>
+          </a:fontRef>
+        </p:style>
+        <p:txBody>
+          <a:bodyPr rtlCol="0" anchor="ctr"/>
+          <a:lstStyle/>
+          <a:p>
+            <a:pPr algn="ctr"/>
+          </a:p>
+        </p:txBody>
+      </p:sp>
       <p:pic>
         <p:nvPicPr>
-          <p:cNvPr id="7" name="Picture 6" descr="check_steel.png"/>
+          <p:cNvPr id="8" name="Picture 7" descr="check_white.png"/>
           <p:cNvPicPr>
             <a:picLocks noChangeAspect="1"/>
           </p:cNvPicPr>
@@ -4407,8 +4524,8 @@
         </p:blipFill>
         <p:spPr>
           <a:xfrm>
-            <a:off x="987552" y="2542032"/>
-            <a:ext cx="237744" cy="237744"/>
+            <a:off x="1110447" y="2655783"/>
+            <a:ext cx="266273" cy="266273"/>
           </a:xfrm>
           <a:prstGeom prst="rect">
             <a:avLst/>
@@ -4417,14 +4534,14 @@
       </p:pic>
       <p:sp>
         <p:nvSpPr>
-          <p:cNvPr id="8" name="TextBox 7"/>
+          <p:cNvPr id="9" name="TextBox 8"/>
           <p:cNvSpPr txBox="1"/>
           <p:nvPr/>
         </p:nvSpPr>
         <p:spPr>
           <a:xfrm>
-            <a:off x="1353312" y="2395728"/>
-            <a:ext cx="5029200" cy="530352"/>
+            <a:off x="1627632" y="2395728"/>
+            <a:ext cx="4206240" cy="786384"/>
           </a:xfrm>
           <a:prstGeom prst="rect">
             <a:avLst/>
@@ -4449,7 +4566,7 @@
               </a:spcAft>
             </a:pPr>
             <a:r>
-              <a:rPr sz="1200" b="0">
+              <a:rPr sz="1150" b="0">
                 <a:solidFill>
                   <a:srgbClr val="1A1A1A"/>
                 </a:solidFill>
@@ -4462,18 +4579,18 @@
       </p:sp>
       <p:sp>
         <p:nvSpPr>
-          <p:cNvPr id="9" name="Rounded Rectangle 8"/>
+          <p:cNvPr id="10" name="Rounded Rectangle 9"/>
           <p:cNvSpPr/>
           <p:nvPr/>
         </p:nvSpPr>
         <p:spPr>
           <a:xfrm>
-            <a:off x="841248" y="2999232"/>
-            <a:ext cx="5715000" cy="530352"/>
+            <a:off x="6254496" y="2395728"/>
+            <a:ext cx="5138928" cy="786384"/>
           </a:xfrm>
           <a:prstGeom prst="roundRect">
             <a:avLst>
-              <a:gd name="adj" fmla="val 6000"/>
+              <a:gd name="adj" fmla="val 7000"/>
             </a:avLst>
           </a:prstGeom>
           <a:solidFill>
@@ -4508,9 +4625,55 @@
           </a:p>
         </p:txBody>
       </p:sp>
+      <p:sp>
+        <p:nvSpPr>
+          <p:cNvPr id="11" name="Rounded Rectangle 10"/>
+          <p:cNvSpPr/>
+          <p:nvPr/>
+        </p:nvSpPr>
+        <p:spPr>
+          <a:xfrm>
+            <a:off x="6400800" y="2532888"/>
+            <a:ext cx="512064" cy="512064"/>
+          </a:xfrm>
+          <a:prstGeom prst="roundRect">
+            <a:avLst>
+              <a:gd name="adj" fmla="val 26000"/>
+            </a:avLst>
+          </a:prstGeom>
+          <a:solidFill>
+            <a:srgbClr val="EE0000"/>
+          </a:solidFill>
+          <a:ln>
+            <a:noFill/>
+          </a:ln>
+          <a:effectLst/>
+        </p:spPr>
+        <p:style>
+          <a:lnRef idx="1">
+            <a:schemeClr val="accent1"/>
+          </a:lnRef>
+          <a:fillRef idx="3">
+            <a:schemeClr val="accent1"/>
+          </a:fillRef>
+          <a:effectRef idx="2">
+            <a:schemeClr val="accent1"/>
+          </a:effectRef>
+          <a:fontRef idx="minor">
+            <a:schemeClr val="lt1"/>
+          </a:fontRef>
+        </p:style>
+        <p:txBody>
+          <a:bodyPr rtlCol="0" anchor="ctr"/>
+          <a:lstStyle/>
+          <a:p>
+            <a:pPr algn="ctr"/>
+          </a:p>
+        </p:txBody>
+      </p:sp>
       <p:pic>
         <p:nvPicPr>
-          <p:cNvPr id="10" name="Picture 9" descr="check_steel.png"/>
+          <p:cNvPr id="12" name="Picture 11" descr="check_white.png"/>
           <p:cNvPicPr>
             <a:picLocks noChangeAspect="1"/>
           </p:cNvPicPr>
@@ -4524,8 +4687,8 @@
         </p:blipFill>
         <p:spPr>
           <a:xfrm>
-            <a:off x="987552" y="3145536"/>
-            <a:ext cx="237744" cy="237744"/>
+            <a:off x="6523695" y="2655783"/>
+            <a:ext cx="266273" cy="266273"/>
           </a:xfrm>
           <a:prstGeom prst="rect">
             <a:avLst/>
@@ -4534,14 +4697,14 @@
       </p:pic>
       <p:sp>
         <p:nvSpPr>
-          <p:cNvPr id="11" name="TextBox 10"/>
+          <p:cNvPr id="13" name="TextBox 12"/>
           <p:cNvSpPr txBox="1"/>
           <p:nvPr/>
         </p:nvSpPr>
         <p:spPr>
           <a:xfrm>
-            <a:off x="1353312" y="2999232"/>
-            <a:ext cx="5029200" cy="530352"/>
+            <a:off x="7040880" y="2395728"/>
+            <a:ext cx="4206240" cy="786384"/>
           </a:xfrm>
           <a:prstGeom prst="rect">
             <a:avLst/>
@@ -4566,7 +4729,7 @@
               </a:spcAft>
             </a:pPr>
             <a:r>
-              <a:rPr sz="1200" b="0">
+              <a:rPr sz="1150" b="0">
                 <a:solidFill>
                   <a:srgbClr val="1A1A1A"/>
                 </a:solidFill>
@@ -4579,18 +4742,18 @@
       </p:sp>
       <p:sp>
         <p:nvSpPr>
-          <p:cNvPr id="12" name="Rounded Rectangle 11"/>
+          <p:cNvPr id="14" name="Rounded Rectangle 13"/>
           <p:cNvSpPr/>
           <p:nvPr/>
         </p:nvSpPr>
         <p:spPr>
           <a:xfrm>
-            <a:off x="841248" y="3602736"/>
-            <a:ext cx="5715000" cy="530352"/>
+            <a:off x="841248" y="3328416"/>
+            <a:ext cx="5138928" cy="786384"/>
           </a:xfrm>
           <a:prstGeom prst="roundRect">
             <a:avLst>
-              <a:gd name="adj" fmla="val 6000"/>
+              <a:gd name="adj" fmla="val 7000"/>
             </a:avLst>
           </a:prstGeom>
           <a:solidFill>
@@ -4625,9 +4788,55 @@
           </a:p>
         </p:txBody>
       </p:sp>
+      <p:sp>
+        <p:nvSpPr>
+          <p:cNvPr id="15" name="Rounded Rectangle 14"/>
+          <p:cNvSpPr/>
+          <p:nvPr/>
+        </p:nvSpPr>
+        <p:spPr>
+          <a:xfrm>
+            <a:off x="987552" y="3465576"/>
+            <a:ext cx="512064" cy="512064"/>
+          </a:xfrm>
+          <a:prstGeom prst="roundRect">
+            <a:avLst>
+              <a:gd name="adj" fmla="val 26000"/>
+            </a:avLst>
+          </a:prstGeom>
+          <a:solidFill>
+            <a:srgbClr val="EE0000"/>
+          </a:solidFill>
+          <a:ln>
+            <a:noFill/>
+          </a:ln>
+          <a:effectLst/>
+        </p:spPr>
+        <p:style>
+          <a:lnRef idx="1">
+            <a:schemeClr val="accent1"/>
+          </a:lnRef>
+          <a:fillRef idx="3">
+            <a:schemeClr val="accent1"/>
+          </a:fillRef>
+          <a:effectRef idx="2">
+            <a:schemeClr val="accent1"/>
+          </a:effectRef>
+          <a:fontRef idx="minor">
+            <a:schemeClr val="lt1"/>
+          </a:fontRef>
+        </p:style>
+        <p:txBody>
+          <a:bodyPr rtlCol="0" anchor="ctr"/>
+          <a:lstStyle/>
+          <a:p>
+            <a:pPr algn="ctr"/>
+          </a:p>
+        </p:txBody>
+      </p:sp>
       <p:pic>
         <p:nvPicPr>
-          <p:cNvPr id="13" name="Picture 12" descr="check_steel.png"/>
+          <p:cNvPr id="16" name="Picture 15" descr="check_white.png"/>
           <p:cNvPicPr>
             <a:picLocks noChangeAspect="1"/>
           </p:cNvPicPr>
@@ -4641,8 +4850,8 @@
         </p:blipFill>
         <p:spPr>
           <a:xfrm>
-            <a:off x="987552" y="3749040"/>
-            <a:ext cx="237744" cy="237744"/>
+            <a:off x="1110447" y="3588471"/>
+            <a:ext cx="266273" cy="266273"/>
           </a:xfrm>
           <a:prstGeom prst="rect">
             <a:avLst/>
@@ -4651,14 +4860,14 @@
       </p:pic>
       <p:sp>
         <p:nvSpPr>
-          <p:cNvPr id="14" name="TextBox 13"/>
+          <p:cNvPr id="17" name="TextBox 16"/>
           <p:cNvSpPr txBox="1"/>
           <p:nvPr/>
         </p:nvSpPr>
         <p:spPr>
           <a:xfrm>
-            <a:off x="1353312" y="3602736"/>
-            <a:ext cx="5029200" cy="530352"/>
+            <a:off x="1627632" y="3328416"/>
+            <a:ext cx="4206240" cy="786384"/>
           </a:xfrm>
           <a:prstGeom prst="rect">
             <a:avLst/>
@@ -4683,7 +4892,7 @@
               </a:spcAft>
             </a:pPr>
             <a:r>
-              <a:rPr sz="1200" b="0">
+              <a:rPr sz="1150" b="0">
                 <a:solidFill>
                   <a:srgbClr val="1A1A1A"/>
                 </a:solidFill>
@@ -4696,18 +4905,18 @@
       </p:sp>
       <p:sp>
         <p:nvSpPr>
-          <p:cNvPr id="15" name="Rounded Rectangle 14"/>
+          <p:cNvPr id="18" name="Rounded Rectangle 17"/>
           <p:cNvSpPr/>
           <p:nvPr/>
         </p:nvSpPr>
         <p:spPr>
           <a:xfrm>
-            <a:off x="841248" y="4206240"/>
-            <a:ext cx="5715000" cy="530352"/>
+            <a:off x="6254496" y="3328416"/>
+            <a:ext cx="5138928" cy="786384"/>
           </a:xfrm>
           <a:prstGeom prst="roundRect">
             <a:avLst>
-              <a:gd name="adj" fmla="val 6000"/>
+              <a:gd name="adj" fmla="val 7000"/>
             </a:avLst>
           </a:prstGeom>
           <a:solidFill>
@@ -4742,9 +4951,55 @@
           </a:p>
         </p:txBody>
       </p:sp>
+      <p:sp>
+        <p:nvSpPr>
+          <p:cNvPr id="19" name="Rounded Rectangle 18"/>
+          <p:cNvSpPr/>
+          <p:nvPr/>
+        </p:nvSpPr>
+        <p:spPr>
+          <a:xfrm>
+            <a:off x="6400800" y="3465576"/>
+            <a:ext cx="512064" cy="512064"/>
+          </a:xfrm>
+          <a:prstGeom prst="roundRect">
+            <a:avLst>
+              <a:gd name="adj" fmla="val 26000"/>
+            </a:avLst>
+          </a:prstGeom>
+          <a:solidFill>
+            <a:srgbClr val="EE0000"/>
+          </a:solidFill>
+          <a:ln>
+            <a:noFill/>
+          </a:ln>
+          <a:effectLst/>
+        </p:spPr>
+        <p:style>
+          <a:lnRef idx="1">
+            <a:schemeClr val="accent1"/>
+          </a:lnRef>
+          <a:fillRef idx="3">
+            <a:schemeClr val="accent1"/>
+          </a:fillRef>
+          <a:effectRef idx="2">
+            <a:schemeClr val="accent1"/>
+          </a:effectRef>
+          <a:fontRef idx="minor">
+            <a:schemeClr val="lt1"/>
+          </a:fontRef>
+        </p:style>
+        <p:txBody>
+          <a:bodyPr rtlCol="0" anchor="ctr"/>
+          <a:lstStyle/>
+          <a:p>
+            <a:pPr algn="ctr"/>
+          </a:p>
+        </p:txBody>
+      </p:sp>
       <p:pic>
         <p:nvPicPr>
-          <p:cNvPr id="16" name="Picture 15" descr="check_steel.png"/>
+          <p:cNvPr id="20" name="Picture 19" descr="check_white.png"/>
           <p:cNvPicPr>
             <a:picLocks noChangeAspect="1"/>
           </p:cNvPicPr>
@@ -4758,8 +5013,8 @@
         </p:blipFill>
         <p:spPr>
           <a:xfrm>
-            <a:off x="987552" y="4352544"/>
-            <a:ext cx="237744" cy="237744"/>
+            <a:off x="6523695" y="3588471"/>
+            <a:ext cx="266273" cy="266273"/>
           </a:xfrm>
           <a:prstGeom prst="rect">
             <a:avLst/>
@@ -4768,14 +5023,14 @@
       </p:pic>
       <p:sp>
         <p:nvSpPr>
-          <p:cNvPr id="17" name="TextBox 16"/>
+          <p:cNvPr id="21" name="TextBox 20"/>
           <p:cNvSpPr txBox="1"/>
           <p:nvPr/>
         </p:nvSpPr>
         <p:spPr>
           <a:xfrm>
-            <a:off x="1353312" y="4206240"/>
-            <a:ext cx="5029200" cy="530352"/>
+            <a:off x="7040880" y="3328416"/>
+            <a:ext cx="4206240" cy="786384"/>
           </a:xfrm>
           <a:prstGeom prst="rect">
             <a:avLst/>
@@ -4800,7 +5055,7 @@
               </a:spcAft>
             </a:pPr>
             <a:r>
-              <a:rPr sz="1200" b="0">
+              <a:rPr sz="1150" b="0">
                 <a:solidFill>
                   <a:srgbClr val="1A1A1A"/>
                 </a:solidFill>
@@ -4813,18 +5068,18 @@
       </p:sp>
       <p:sp>
         <p:nvSpPr>
-          <p:cNvPr id="18" name="Rounded Rectangle 17"/>
+          <p:cNvPr id="22" name="Rounded Rectangle 21"/>
           <p:cNvSpPr/>
           <p:nvPr/>
         </p:nvSpPr>
         <p:spPr>
           <a:xfrm>
-            <a:off x="841248" y="4809744"/>
-            <a:ext cx="5715000" cy="530352"/>
+            <a:off x="841248" y="4261104"/>
+            <a:ext cx="5138928" cy="786384"/>
           </a:xfrm>
           <a:prstGeom prst="roundRect">
             <a:avLst>
-              <a:gd name="adj" fmla="val 6000"/>
+              <a:gd name="adj" fmla="val 7000"/>
             </a:avLst>
           </a:prstGeom>
           <a:solidFill>
@@ -4859,9 +5114,55 @@
           </a:p>
         </p:txBody>
       </p:sp>
+      <p:sp>
+        <p:nvSpPr>
+          <p:cNvPr id="23" name="Rounded Rectangle 22"/>
+          <p:cNvSpPr/>
+          <p:nvPr/>
+        </p:nvSpPr>
+        <p:spPr>
+          <a:xfrm>
+            <a:off x="987552" y="4398264"/>
+            <a:ext cx="512064" cy="512064"/>
+          </a:xfrm>
+          <a:prstGeom prst="roundRect">
+            <a:avLst>
+              <a:gd name="adj" fmla="val 26000"/>
+            </a:avLst>
+          </a:prstGeom>
+          <a:solidFill>
+            <a:srgbClr val="EE0000"/>
+          </a:solidFill>
+          <a:ln>
+            <a:noFill/>
+          </a:ln>
+          <a:effectLst/>
+        </p:spPr>
+        <p:style>
+          <a:lnRef idx="1">
+            <a:schemeClr val="accent1"/>
+          </a:lnRef>
+          <a:fillRef idx="3">
+            <a:schemeClr val="accent1"/>
+          </a:fillRef>
+          <a:effectRef idx="2">
+            <a:schemeClr val="accent1"/>
+          </a:effectRef>
+          <a:fontRef idx="minor">
+            <a:schemeClr val="lt1"/>
+          </a:fontRef>
+        </p:style>
+        <p:txBody>
+          <a:bodyPr rtlCol="0" anchor="ctr"/>
+          <a:lstStyle/>
+          <a:p>
+            <a:pPr algn="ctr"/>
+          </a:p>
+        </p:txBody>
+      </p:sp>
       <p:pic>
         <p:nvPicPr>
-          <p:cNvPr id="19" name="Picture 18" descr="check_steel.png"/>
+          <p:cNvPr id="24" name="Picture 23" descr="check_white.png"/>
           <p:cNvPicPr>
             <a:picLocks noChangeAspect="1"/>
           </p:cNvPicPr>
@@ -4875,8 +5176,8 @@
         </p:blipFill>
         <p:spPr>
           <a:xfrm>
-            <a:off x="987552" y="4956048"/>
-            <a:ext cx="237744" cy="237744"/>
+            <a:off x="1110447" y="4521159"/>
+            <a:ext cx="266273" cy="266273"/>
           </a:xfrm>
           <a:prstGeom prst="rect">
             <a:avLst/>
@@ -4885,14 +5186,14 @@
       </p:pic>
       <p:sp>
         <p:nvSpPr>
-          <p:cNvPr id="20" name="TextBox 19"/>
+          <p:cNvPr id="25" name="TextBox 24"/>
           <p:cNvSpPr txBox="1"/>
           <p:nvPr/>
         </p:nvSpPr>
         <p:spPr>
           <a:xfrm>
-            <a:off x="1353312" y="4809744"/>
-            <a:ext cx="5029200" cy="530352"/>
+            <a:off x="1627632" y="4261104"/>
+            <a:ext cx="4206240" cy="786384"/>
           </a:xfrm>
           <a:prstGeom prst="rect">
             <a:avLst/>
@@ -4917,221 +5218,13 @@
               </a:spcAft>
             </a:pPr>
             <a:r>
-              <a:rPr sz="1200" b="0">
+              <a:rPr sz="1150" b="0">
                 <a:solidFill>
                   <a:srgbClr val="1A1A1A"/>
                 </a:solidFill>
                 <a:latin typeface="Red Hat Text"/>
               </a:rPr>
               <a:t>Vibe coding, safely = scope the identity, audit the actions, keep a human on writes</a:t>
-            </a:r>
-          </a:p>
-        </p:txBody>
-      </p:sp>
-      <p:sp>
-        <p:nvSpPr>
-          <p:cNvPr id="21" name="Rounded Rectangle 20"/>
-          <p:cNvSpPr/>
-          <p:nvPr/>
-        </p:nvSpPr>
-        <p:spPr>
-          <a:xfrm>
-            <a:off x="6812280" y="2395728"/>
-            <a:ext cx="4538167" cy="2944368"/>
-          </a:xfrm>
-          <a:prstGeom prst="roundRect">
-            <a:avLst>
-              <a:gd name="adj" fmla="val 4000"/>
-            </a:avLst>
-          </a:prstGeom>
-          <a:solidFill>
-            <a:srgbClr val="FFFFFF"/>
-          </a:solidFill>
-          <a:ln w="15240">
-            <a:solidFill>
-              <a:srgbClr val="DDE1E6"/>
-            </a:solidFill>
-          </a:ln>
-          <a:effectLst/>
-        </p:spPr>
-        <p:style>
-          <a:lnRef idx="1">
-            <a:schemeClr val="accent1"/>
-          </a:lnRef>
-          <a:fillRef idx="3">
-            <a:schemeClr val="accent1"/>
-          </a:fillRef>
-          <a:effectRef idx="2">
-            <a:schemeClr val="accent1"/>
-          </a:effectRef>
-          <a:fontRef idx="minor">
-            <a:schemeClr val="lt1"/>
-          </a:fontRef>
-        </p:style>
-        <p:txBody>
-          <a:bodyPr rtlCol="0" anchor="ctr"/>
-          <a:lstStyle/>
-          <a:p>
-            <a:pPr algn="ctr"/>
-          </a:p>
-        </p:txBody>
-      </p:sp>
-      <p:sp>
-        <p:nvSpPr>
-          <p:cNvPr id="22" name="Rounded Rectangle 21"/>
-          <p:cNvSpPr/>
-          <p:nvPr/>
-        </p:nvSpPr>
-        <p:spPr>
-          <a:xfrm>
-            <a:off x="7013448" y="2596896"/>
-            <a:ext cx="1298448" cy="310896"/>
-          </a:xfrm>
-          <a:prstGeom prst="roundRect">
-            <a:avLst>
-              <a:gd name="adj" fmla="val 50000"/>
-            </a:avLst>
-          </a:prstGeom>
-          <a:solidFill>
-            <a:srgbClr val="FCECEC"/>
-          </a:solidFill>
-          <a:ln>
-            <a:noFill/>
-          </a:ln>
-          <a:effectLst/>
-        </p:spPr>
-        <p:style>
-          <a:lnRef idx="1">
-            <a:schemeClr val="accent1"/>
-          </a:lnRef>
-          <a:fillRef idx="3">
-            <a:schemeClr val="accent1"/>
-          </a:fillRef>
-          <a:effectRef idx="2">
-            <a:schemeClr val="accent1"/>
-          </a:effectRef>
-          <a:fontRef idx="minor">
-            <a:schemeClr val="lt1"/>
-          </a:fontRef>
-        </p:style>
-        <p:txBody>
-          <a:bodyPr rtlCol="0" anchor="ctr"/>
-          <a:lstStyle/>
-          <a:p>
-            <a:pPr algn="ctr"/>
-          </a:p>
-        </p:txBody>
-      </p:sp>
-      <p:sp>
-        <p:nvSpPr>
-          <p:cNvPr id="23" name="TextBox 22"/>
-          <p:cNvSpPr txBox="1"/>
-          <p:nvPr/>
-        </p:nvSpPr>
-        <p:spPr>
-          <a:xfrm>
-            <a:off x="7013448" y="2596896"/>
-            <a:ext cx="1298448" cy="310896"/>
-          </a:xfrm>
-          <a:prstGeom prst="rect">
-            <a:avLst/>
-          </a:prstGeom>
-          <a:noFill/>
-        </p:spPr>
-        <p:txBody>
-          <a:bodyPr wrap="none" anchor="ctr" lIns="0" rIns="0" tIns="0" bIns="0">
-            <a:spAutoFit/>
-          </a:bodyPr>
-          <a:lstStyle/>
-          <a:p>
-            <a:pPr algn="ctr">
-              <a:lnSpc>
-                <a:spcPct val="106000"/>
-              </a:lnSpc>
-              <a:spcBef>
-                <a:spcPts val="0"/>
-              </a:spcBef>
-              <a:spcAft>
-                <a:spcPts val="0"/>
-              </a:spcAft>
-            </a:pPr>
-            <a:r>
-              <a:rPr sz="850" b="1">
-                <a:solidFill>
-                  <a:srgbClr val="B80000"/>
-                </a:solidFill>
-                <a:latin typeface="Red Hat Display"/>
-              </a:rPr>
-              <a:t>MEDIA PASS</a:t>
-            </a:r>
-          </a:p>
-        </p:txBody>
-      </p:sp>
-      <p:pic>
-        <p:nvPicPr>
-          <p:cNvPr id="24" name="Picture 23" descr="eye_slate.png"/>
-          <p:cNvPicPr>
-            <a:picLocks noChangeAspect="1"/>
-          </p:cNvPicPr>
-          <p:nvPr/>
-        </p:nvPicPr>
-        <p:blipFill>
-          <a:blip r:embed="rId4"/>
-          <a:stretch>
-            <a:fillRect/>
-          </a:stretch>
-        </p:blipFill>
-        <p:spPr>
-          <a:xfrm>
-            <a:off x="8843619" y="3108960"/>
-            <a:ext cx="475488" cy="475488"/>
-          </a:xfrm>
-          <a:prstGeom prst="rect">
-            <a:avLst/>
-          </a:prstGeom>
-        </p:spPr>
-      </p:pic>
-      <p:sp>
-        <p:nvSpPr>
-          <p:cNvPr id="25" name="TextBox 24"/>
-          <p:cNvSpPr txBox="1"/>
-          <p:nvPr/>
-        </p:nvSpPr>
-        <p:spPr>
-          <a:xfrm>
-            <a:off x="7050024" y="3721608"/>
-            <a:ext cx="4062679" cy="1481328"/>
-          </a:xfrm>
-          <a:prstGeom prst="rect">
-            <a:avLst/>
-          </a:prstGeom>
-          <a:noFill/>
-        </p:spPr>
-        <p:txBody>
-          <a:bodyPr wrap="square" anchor="t" lIns="0" rIns="0" tIns="0" bIns="0">
-            <a:spAutoFit/>
-          </a:bodyPr>
-          <a:lstStyle/>
-          <a:p>
-            <a:pPr algn="l">
-              <a:lnSpc>
-                <a:spcPct val="120000"/>
-              </a:lnSpc>
-              <a:spcBef>
-                <a:spcPts val="0"/>
-              </a:spcBef>
-              <a:spcAft>
-                <a:spcPts val="0"/>
-              </a:spcAft>
-            </a:pPr>
-            <a:r>
-              <a:rPr sz="950" b="0">
-                <a:solidFill>
-                  <a:srgbClr val="8A9099"/>
-                </a:solidFill>
-                <a:latin typeface="Red Hat Text"/>
-              </a:rPr>
-              <a:t>A split — left: an engineer pasting `oc get` output into a chat window, shrugging ("is this even current?"); right: the same assistant wired straight into a cluster, with a small padlock labeled "identity: mcp-agent (view, one namespace)". Arrow labeled "now it can act."</a:t>
             </a:r>
           </a:p>
         </p:txBody>
@@ -5484,7 +5577,7 @@
         <p:spPr>
           <a:xfrm>
             <a:off x="841248" y="2670048"/>
-            <a:ext cx="5715000" cy="530352"/>
+            <a:ext cx="4160520" cy="475488"/>
           </a:xfrm>
           <a:prstGeom prst="roundRect">
             <a:avLst>
@@ -5539,8 +5632,8 @@
         </p:blipFill>
         <p:spPr>
           <a:xfrm>
-            <a:off x="987552" y="2816352"/>
-            <a:ext cx="237744" cy="237744"/>
+            <a:off x="969264" y="2807208"/>
+            <a:ext cx="201168" cy="201168"/>
           </a:xfrm>
           <a:prstGeom prst="rect">
             <a:avLst/>
@@ -5555,8 +5648,8 @@
         </p:nvSpPr>
         <p:spPr>
           <a:xfrm>
-            <a:off x="1353312" y="2670048"/>
-            <a:ext cx="5029200" cy="530352"/>
+            <a:off x="1280160" y="2670048"/>
+            <a:ext cx="3593591" cy="475488"/>
           </a:xfrm>
           <a:prstGeom prst="rect">
             <a:avLst/>
@@ -5581,7 +5674,7 @@
               </a:spcAft>
             </a:pPr>
             <a:r>
-              <a:rPr sz="1200" b="0">
+              <a:rPr sz="1050" b="0">
                 <a:solidFill>
                   <a:srgbClr val="1A1A1A"/>
                 </a:solidFill>
@@ -5600,8 +5693,8 @@
         </p:nvSpPr>
         <p:spPr>
           <a:xfrm>
-            <a:off x="841248" y="3273552"/>
-            <a:ext cx="5715000" cy="530352"/>
+            <a:off x="841248" y="3218688"/>
+            <a:ext cx="4160520" cy="475488"/>
           </a:xfrm>
           <a:prstGeom prst="roundRect">
             <a:avLst>
@@ -5656,8 +5749,8 @@
         </p:blipFill>
         <p:spPr>
           <a:xfrm>
-            <a:off x="987552" y="3419856"/>
-            <a:ext cx="237744" cy="237744"/>
+            <a:off x="969264" y="3355848"/>
+            <a:ext cx="201168" cy="201168"/>
           </a:xfrm>
           <a:prstGeom prst="rect">
             <a:avLst/>
@@ -5672,8 +5765,8 @@
         </p:nvSpPr>
         <p:spPr>
           <a:xfrm>
-            <a:off x="1353312" y="3273552"/>
-            <a:ext cx="5029200" cy="530352"/>
+            <a:off x="1280160" y="3218688"/>
+            <a:ext cx="3593591" cy="475488"/>
           </a:xfrm>
           <a:prstGeom prst="rect">
             <a:avLst/>
@@ -5698,7 +5791,7 @@
               </a:spcAft>
             </a:pPr>
             <a:r>
-              <a:rPr sz="1200" b="0">
+              <a:rPr sz="1050" b="0">
                 <a:solidFill>
                   <a:srgbClr val="1A1A1A"/>
                 </a:solidFill>
@@ -5717,8 +5810,8 @@
         </p:nvSpPr>
         <p:spPr>
           <a:xfrm>
-            <a:off x="841248" y="3877056"/>
-            <a:ext cx="5715000" cy="530352"/>
+            <a:off x="841248" y="3767328"/>
+            <a:ext cx="4160520" cy="475488"/>
           </a:xfrm>
           <a:prstGeom prst="roundRect">
             <a:avLst>
@@ -5773,8 +5866,8 @@
         </p:blipFill>
         <p:spPr>
           <a:xfrm>
-            <a:off x="987552" y="4023360"/>
-            <a:ext cx="237744" cy="237744"/>
+            <a:off x="969264" y="3904487"/>
+            <a:ext cx="201168" cy="201168"/>
           </a:xfrm>
           <a:prstGeom prst="rect">
             <a:avLst/>
@@ -5789,8 +5882,8 @@
         </p:nvSpPr>
         <p:spPr>
           <a:xfrm>
-            <a:off x="1353312" y="3877056"/>
-            <a:ext cx="5029200" cy="530352"/>
+            <a:off x="1280160" y="3767328"/>
+            <a:ext cx="3593591" cy="475488"/>
           </a:xfrm>
           <a:prstGeom prst="rect">
             <a:avLst/>
@@ -5815,7 +5908,7 @@
               </a:spcAft>
             </a:pPr>
             <a:r>
-              <a:rPr sz="1200" b="0">
+              <a:rPr sz="1050" b="0">
                 <a:solidFill>
                   <a:srgbClr val="1A1A1A"/>
                 </a:solidFill>
@@ -5834,8 +5927,8 @@
         </p:nvSpPr>
         <p:spPr>
           <a:xfrm>
-            <a:off x="841248" y="4480560"/>
-            <a:ext cx="5715000" cy="530352"/>
+            <a:off x="841248" y="4315968"/>
+            <a:ext cx="4160520" cy="475488"/>
           </a:xfrm>
           <a:prstGeom prst="roundRect">
             <a:avLst>
@@ -5890,8 +5983,8 @@
         </p:blipFill>
         <p:spPr>
           <a:xfrm>
-            <a:off x="987552" y="4626864"/>
-            <a:ext cx="237744" cy="237744"/>
+            <a:off x="969264" y="4453127"/>
+            <a:ext cx="201168" cy="201168"/>
           </a:xfrm>
           <a:prstGeom prst="rect">
             <a:avLst/>
@@ -5906,8 +5999,8 @@
         </p:nvSpPr>
         <p:spPr>
           <a:xfrm>
-            <a:off x="1353312" y="4480560"/>
-            <a:ext cx="5029200" cy="530352"/>
+            <a:off x="1280160" y="4315968"/>
+            <a:ext cx="3593591" cy="475488"/>
           </a:xfrm>
           <a:prstGeom prst="rect">
             <a:avLst/>
@@ -5932,7 +6025,7 @@
               </a:spcAft>
             </a:pPr>
             <a:r>
-              <a:rPr sz="1200" b="0">
+              <a:rPr sz="1050" b="0">
                 <a:solidFill>
                   <a:srgbClr val="1A1A1A"/>
                 </a:solidFill>
@@ -5951,8 +6044,8 @@
         </p:nvSpPr>
         <p:spPr>
           <a:xfrm>
-            <a:off x="841248" y="5084064"/>
-            <a:ext cx="5715000" cy="530352"/>
+            <a:off x="841248" y="4864607"/>
+            <a:ext cx="4160520" cy="475488"/>
           </a:xfrm>
           <a:prstGeom prst="roundRect">
             <a:avLst>
@@ -6007,8 +6100,8 @@
         </p:blipFill>
         <p:spPr>
           <a:xfrm>
-            <a:off x="987552" y="5230368"/>
-            <a:ext cx="237744" cy="237744"/>
+            <a:off x="969264" y="5001767"/>
+            <a:ext cx="201168" cy="201168"/>
           </a:xfrm>
           <a:prstGeom prst="rect">
             <a:avLst/>
@@ -6023,8 +6116,8 @@
         </p:nvSpPr>
         <p:spPr>
           <a:xfrm>
-            <a:off x="1353312" y="5084064"/>
-            <a:ext cx="5029200" cy="530352"/>
+            <a:off x="1280160" y="4864607"/>
+            <a:ext cx="3593591" cy="475488"/>
           </a:xfrm>
           <a:prstGeom prst="rect">
             <a:avLst/>
@@ -6049,7 +6142,7 @@
               </a:spcAft>
             </a:pPr>
             <a:r>
-              <a:rPr sz="1200" b="0">
+              <a:rPr sz="1050" b="0">
                 <a:solidFill>
                   <a:srgbClr val="1A1A1A"/>
                 </a:solidFill>
@@ -6068,8 +6161,8 @@
         </p:nvSpPr>
         <p:spPr>
           <a:xfrm>
-            <a:off x="6812280" y="2670048"/>
-            <a:ext cx="4538167" cy="2944368"/>
+            <a:off x="5385816" y="3361819"/>
+            <a:ext cx="5964631" cy="1359657"/>
           </a:xfrm>
           <a:prstGeom prst="roundRect">
             <a:avLst>
@@ -6108,100 +6201,9 @@
           </a:p>
         </p:txBody>
       </p:sp>
-      <p:sp>
-        <p:nvSpPr>
-          <p:cNvPr id="23" name="Rounded Rectangle 22"/>
-          <p:cNvSpPr/>
-          <p:nvPr/>
-        </p:nvSpPr>
-        <p:spPr>
-          <a:xfrm>
-            <a:off x="7013448" y="2871216"/>
-            <a:ext cx="1298448" cy="310896"/>
-          </a:xfrm>
-          <a:prstGeom prst="roundRect">
-            <a:avLst>
-              <a:gd name="adj" fmla="val 50000"/>
-            </a:avLst>
-          </a:prstGeom>
-          <a:solidFill>
-            <a:srgbClr val="FCECEC"/>
-          </a:solidFill>
-          <a:ln>
-            <a:noFill/>
-          </a:ln>
-          <a:effectLst/>
-        </p:spPr>
-        <p:style>
-          <a:lnRef idx="1">
-            <a:schemeClr val="accent1"/>
-          </a:lnRef>
-          <a:fillRef idx="3">
-            <a:schemeClr val="accent1"/>
-          </a:fillRef>
-          <a:effectRef idx="2">
-            <a:schemeClr val="accent1"/>
-          </a:effectRef>
-          <a:fontRef idx="minor">
-            <a:schemeClr val="lt1"/>
-          </a:fontRef>
-        </p:style>
-        <p:txBody>
-          <a:bodyPr rtlCol="0" anchor="ctr"/>
-          <a:lstStyle/>
-          <a:p>
-            <a:pPr algn="ctr"/>
-          </a:p>
-        </p:txBody>
-      </p:sp>
-      <p:sp>
-        <p:nvSpPr>
-          <p:cNvPr id="24" name="TextBox 23"/>
-          <p:cNvSpPr txBox="1"/>
-          <p:nvPr/>
-        </p:nvSpPr>
-        <p:spPr>
-          <a:xfrm>
-            <a:off x="7013448" y="2871216"/>
-            <a:ext cx="1298448" cy="310896"/>
-          </a:xfrm>
-          <a:prstGeom prst="rect">
-            <a:avLst/>
-          </a:prstGeom>
-          <a:noFill/>
-        </p:spPr>
-        <p:txBody>
-          <a:bodyPr wrap="none" anchor="ctr" lIns="0" rIns="0" tIns="0" bIns="0">
-            <a:spAutoFit/>
-          </a:bodyPr>
-          <a:lstStyle/>
-          <a:p>
-            <a:pPr algn="ctr">
-              <a:lnSpc>
-                <a:spcPct val="106000"/>
-              </a:lnSpc>
-              <a:spcBef>
-                <a:spcPts val="0"/>
-              </a:spcBef>
-              <a:spcAft>
-                <a:spcPts val="0"/>
-              </a:spcAft>
-            </a:pPr>
-            <a:r>
-              <a:rPr sz="850" b="1">
-                <a:solidFill>
-                  <a:srgbClr val="B80000"/>
-                </a:solidFill>
-                <a:latin typeface="Red Hat Display"/>
-              </a:rPr>
-              <a:t>MEDIA PASS</a:t>
-            </a:r>
-          </a:p>
-        </p:txBody>
-      </p:sp>
       <p:pic>
         <p:nvPicPr>
-          <p:cNvPr id="25" name="Picture 24" descr="eye_slate.png"/>
+          <p:cNvPr id="23" name="Picture 22" descr="01-mcp-sa-boundary.png"/>
           <p:cNvPicPr>
             <a:picLocks noChangeAspect="1"/>
           </p:cNvPicPr>
@@ -6215,62 +6217,17 @@
         </p:blipFill>
         <p:spPr>
           <a:xfrm>
-            <a:off x="8843619" y="3383280"/>
-            <a:ext cx="475488" cy="475488"/>
+            <a:off x="5532120" y="3508123"/>
+            <a:ext cx="5672023" cy="1067049"/>
           </a:xfrm>
           <a:prstGeom prst="rect">
             <a:avLst/>
           </a:prstGeom>
         </p:spPr>
       </p:pic>
-      <p:sp>
-        <p:nvSpPr>
-          <p:cNvPr id="26" name="TextBox 25"/>
-          <p:cNvSpPr txBox="1"/>
-          <p:nvPr/>
-        </p:nvSpPr>
-        <p:spPr>
-          <a:xfrm>
-            <a:off x="7050024" y="3995928"/>
-            <a:ext cx="4062679" cy="1481328"/>
-          </a:xfrm>
-          <a:prstGeom prst="rect">
-            <a:avLst/>
-          </a:prstGeom>
-          <a:noFill/>
-        </p:spPr>
-        <p:txBody>
-          <a:bodyPr wrap="square" anchor="t" lIns="0" rIns="0" tIns="0" bIns="0">
-            <a:spAutoFit/>
-          </a:bodyPr>
-          <a:lstStyle/>
-          <a:p>
-            <a:pPr algn="l">
-              <a:lnSpc>
-                <a:spcPct val="120000"/>
-              </a:lnSpc>
-              <a:spcBef>
-                <a:spcPts val="0"/>
-              </a:spcBef>
-              <a:spcAft>
-                <a:spcPts val="0"/>
-              </a:spcAft>
-            </a:pPr>
-            <a:r>
-              <a:rPr sz="950" b="0">
-                <a:solidFill>
-                  <a:srgbClr val="8A9099"/>
-                </a:solidFill>
-                <a:latin typeface="Red Hat Text"/>
-              </a:rPr>
-              <a:t>Reuse concept diagram ai-assisted-development-...-01-mcp-sa-boundary.svg — client (no kubeconfig) → MCP server (runs as mcp-agent) → RBAC gate → API server; a side branch to the MaaS model. The RBAC gate highlighted red as "the actual boundary."</a:t>
-            </a:r>
-          </a:p>
-        </p:txBody>
-      </p:sp>
       <p:cxnSp>
         <p:nvCxnSpPr>
-          <p:cNvPr id="27" name="Connector 26"/>
+          <p:cNvPr id="24" name="Connector 23"/>
           <p:cNvCxnSpPr/>
           <p:nvPr/>
         </p:nvCxnSpPr>
@@ -6306,7 +6263,7 @@
       </p:cxnSp>
       <p:sp>
         <p:nvSpPr>
-          <p:cNvPr id="28" name="TextBox 27"/>
+          <p:cNvPr id="25" name="TextBox 24"/>
           <p:cNvSpPr txBox="1"/>
           <p:nvPr/>
         </p:nvSpPr>
@@ -6351,7 +6308,7 @@
       </p:sp>
       <p:sp>
         <p:nvSpPr>
-          <p:cNvPr id="29" name="TextBox 28"/>
+          <p:cNvPr id="26" name="TextBox 25"/>
           <p:cNvSpPr txBox="1"/>
           <p:nvPr/>
         </p:nvSpPr>
@@ -6616,11 +6573,11 @@
         <p:spPr>
           <a:xfrm>
             <a:off x="841248" y="2670048"/>
-            <a:ext cx="5715000" cy="530352"/>
+            <a:ext cx="5138928" cy="786384"/>
           </a:xfrm>
           <a:prstGeom prst="roundRect">
             <a:avLst>
-              <a:gd name="adj" fmla="val 6000"/>
+              <a:gd name="adj" fmla="val 7000"/>
             </a:avLst>
           </a:prstGeom>
           <a:solidFill>
@@ -6655,9 +6612,55 @@
           </a:p>
         </p:txBody>
       </p:sp>
+      <p:sp>
+        <p:nvSpPr>
+          <p:cNvPr id="8" name="Rounded Rectangle 7"/>
+          <p:cNvSpPr/>
+          <p:nvPr/>
+        </p:nvSpPr>
+        <p:spPr>
+          <a:xfrm>
+            <a:off x="987552" y="2807208"/>
+            <a:ext cx="512064" cy="512064"/>
+          </a:xfrm>
+          <a:prstGeom prst="roundRect">
+            <a:avLst>
+              <a:gd name="adj" fmla="val 26000"/>
+            </a:avLst>
+          </a:prstGeom>
+          <a:solidFill>
+            <a:srgbClr val="EE0000"/>
+          </a:solidFill>
+          <a:ln>
+            <a:noFill/>
+          </a:ln>
+          <a:effectLst/>
+        </p:spPr>
+        <p:style>
+          <a:lnRef idx="1">
+            <a:schemeClr val="accent1"/>
+          </a:lnRef>
+          <a:fillRef idx="3">
+            <a:schemeClr val="accent1"/>
+          </a:fillRef>
+          <a:effectRef idx="2">
+            <a:schemeClr val="accent1"/>
+          </a:effectRef>
+          <a:fontRef idx="minor">
+            <a:schemeClr val="lt1"/>
+          </a:fontRef>
+        </p:style>
+        <p:txBody>
+          <a:bodyPr rtlCol="0" anchor="ctr"/>
+          <a:lstStyle/>
+          <a:p>
+            <a:pPr algn="ctr"/>
+          </a:p>
+        </p:txBody>
+      </p:sp>
       <p:pic>
         <p:nvPicPr>
-          <p:cNvPr id="8" name="Picture 7" descr="check_steel.png"/>
+          <p:cNvPr id="9" name="Picture 8" descr="check_white.png"/>
           <p:cNvPicPr>
             <a:picLocks noChangeAspect="1"/>
           </p:cNvPicPr>
@@ -6671,8 +6674,8 @@
         </p:blipFill>
         <p:spPr>
           <a:xfrm>
-            <a:off x="987552" y="2816352"/>
-            <a:ext cx="237744" cy="237744"/>
+            <a:off x="1110447" y="2930103"/>
+            <a:ext cx="266273" cy="266273"/>
           </a:xfrm>
           <a:prstGeom prst="rect">
             <a:avLst/>
@@ -6681,14 +6684,14 @@
       </p:pic>
       <p:sp>
         <p:nvSpPr>
-          <p:cNvPr id="9" name="TextBox 8"/>
+          <p:cNvPr id="10" name="TextBox 9"/>
           <p:cNvSpPr txBox="1"/>
           <p:nvPr/>
         </p:nvSpPr>
         <p:spPr>
           <a:xfrm>
-            <a:off x="1353312" y="2670048"/>
-            <a:ext cx="5029200" cy="530352"/>
+            <a:off x="1627632" y="2670048"/>
+            <a:ext cx="4206240" cy="786384"/>
           </a:xfrm>
           <a:prstGeom prst="rect">
             <a:avLst/>
@@ -6713,7 +6716,7 @@
               </a:spcAft>
             </a:pPr>
             <a:r>
-              <a:rPr sz="1200" b="0">
+              <a:rPr sz="1150" b="0">
                 <a:solidFill>
                   <a:srgbClr val="1A1A1A"/>
                 </a:solidFill>
@@ -6726,18 +6729,18 @@
       </p:sp>
       <p:sp>
         <p:nvSpPr>
-          <p:cNvPr id="10" name="Rounded Rectangle 9"/>
+          <p:cNvPr id="11" name="Rounded Rectangle 10"/>
           <p:cNvSpPr/>
           <p:nvPr/>
         </p:nvSpPr>
         <p:spPr>
           <a:xfrm>
-            <a:off x="841248" y="3273552"/>
-            <a:ext cx="5715000" cy="530352"/>
+            <a:off x="6254496" y="2670048"/>
+            <a:ext cx="5138928" cy="786384"/>
           </a:xfrm>
           <a:prstGeom prst="roundRect">
             <a:avLst>
-              <a:gd name="adj" fmla="val 6000"/>
+              <a:gd name="adj" fmla="val 7000"/>
             </a:avLst>
           </a:prstGeom>
           <a:solidFill>
@@ -6772,9 +6775,55 @@
           </a:p>
         </p:txBody>
       </p:sp>
+      <p:sp>
+        <p:nvSpPr>
+          <p:cNvPr id="12" name="Rounded Rectangle 11"/>
+          <p:cNvSpPr/>
+          <p:nvPr/>
+        </p:nvSpPr>
+        <p:spPr>
+          <a:xfrm>
+            <a:off x="6400800" y="2807208"/>
+            <a:ext cx="512064" cy="512064"/>
+          </a:xfrm>
+          <a:prstGeom prst="roundRect">
+            <a:avLst>
+              <a:gd name="adj" fmla="val 26000"/>
+            </a:avLst>
+          </a:prstGeom>
+          <a:solidFill>
+            <a:srgbClr val="EE0000"/>
+          </a:solidFill>
+          <a:ln>
+            <a:noFill/>
+          </a:ln>
+          <a:effectLst/>
+        </p:spPr>
+        <p:style>
+          <a:lnRef idx="1">
+            <a:schemeClr val="accent1"/>
+          </a:lnRef>
+          <a:fillRef idx="3">
+            <a:schemeClr val="accent1"/>
+          </a:fillRef>
+          <a:effectRef idx="2">
+            <a:schemeClr val="accent1"/>
+          </a:effectRef>
+          <a:fontRef idx="minor">
+            <a:schemeClr val="lt1"/>
+          </a:fontRef>
+        </p:style>
+        <p:txBody>
+          <a:bodyPr rtlCol="0" anchor="ctr"/>
+          <a:lstStyle/>
+          <a:p>
+            <a:pPr algn="ctr"/>
+          </a:p>
+        </p:txBody>
+      </p:sp>
       <p:pic>
         <p:nvPicPr>
-          <p:cNvPr id="11" name="Picture 10" descr="check_steel.png"/>
+          <p:cNvPr id="13" name="Picture 12" descr="check_white.png"/>
           <p:cNvPicPr>
             <a:picLocks noChangeAspect="1"/>
           </p:cNvPicPr>
@@ -6788,8 +6837,8 @@
         </p:blipFill>
         <p:spPr>
           <a:xfrm>
-            <a:off x="987552" y="3419856"/>
-            <a:ext cx="237744" cy="237744"/>
+            <a:off x="6523695" y="2930103"/>
+            <a:ext cx="266273" cy="266273"/>
           </a:xfrm>
           <a:prstGeom prst="rect">
             <a:avLst/>
@@ -6798,14 +6847,14 @@
       </p:pic>
       <p:sp>
         <p:nvSpPr>
-          <p:cNvPr id="12" name="TextBox 11"/>
+          <p:cNvPr id="14" name="TextBox 13"/>
           <p:cNvSpPr txBox="1"/>
           <p:nvPr/>
         </p:nvSpPr>
         <p:spPr>
           <a:xfrm>
-            <a:off x="1353312" y="3273552"/>
-            <a:ext cx="5029200" cy="530352"/>
+            <a:off x="7040880" y="2670048"/>
+            <a:ext cx="4206240" cy="786384"/>
           </a:xfrm>
           <a:prstGeom prst="rect">
             <a:avLst/>
@@ -6830,7 +6879,7 @@
               </a:spcAft>
             </a:pPr>
             <a:r>
-              <a:rPr sz="1200" b="0">
+              <a:rPr sz="1150" b="0">
                 <a:solidFill>
                   <a:srgbClr val="1A1A1A"/>
                 </a:solidFill>
@@ -6843,18 +6892,18 @@
       </p:sp>
       <p:sp>
         <p:nvSpPr>
-          <p:cNvPr id="13" name="Rounded Rectangle 12"/>
+          <p:cNvPr id="15" name="Rounded Rectangle 14"/>
           <p:cNvSpPr/>
           <p:nvPr/>
         </p:nvSpPr>
         <p:spPr>
           <a:xfrm>
-            <a:off x="841248" y="3877056"/>
-            <a:ext cx="5715000" cy="530352"/>
+            <a:off x="841248" y="3602736"/>
+            <a:ext cx="5138928" cy="786384"/>
           </a:xfrm>
           <a:prstGeom prst="roundRect">
             <a:avLst>
-              <a:gd name="adj" fmla="val 6000"/>
+              <a:gd name="adj" fmla="val 7000"/>
             </a:avLst>
           </a:prstGeom>
           <a:solidFill>
@@ -6889,9 +6938,55 @@
           </a:p>
         </p:txBody>
       </p:sp>
+      <p:sp>
+        <p:nvSpPr>
+          <p:cNvPr id="16" name="Rounded Rectangle 15"/>
+          <p:cNvSpPr/>
+          <p:nvPr/>
+        </p:nvSpPr>
+        <p:spPr>
+          <a:xfrm>
+            <a:off x="987552" y="3739896"/>
+            <a:ext cx="512064" cy="512064"/>
+          </a:xfrm>
+          <a:prstGeom prst="roundRect">
+            <a:avLst>
+              <a:gd name="adj" fmla="val 26000"/>
+            </a:avLst>
+          </a:prstGeom>
+          <a:solidFill>
+            <a:srgbClr val="EE0000"/>
+          </a:solidFill>
+          <a:ln>
+            <a:noFill/>
+          </a:ln>
+          <a:effectLst/>
+        </p:spPr>
+        <p:style>
+          <a:lnRef idx="1">
+            <a:schemeClr val="accent1"/>
+          </a:lnRef>
+          <a:fillRef idx="3">
+            <a:schemeClr val="accent1"/>
+          </a:fillRef>
+          <a:effectRef idx="2">
+            <a:schemeClr val="accent1"/>
+          </a:effectRef>
+          <a:fontRef idx="minor">
+            <a:schemeClr val="lt1"/>
+          </a:fontRef>
+        </p:style>
+        <p:txBody>
+          <a:bodyPr rtlCol="0" anchor="ctr"/>
+          <a:lstStyle/>
+          <a:p>
+            <a:pPr algn="ctr"/>
+          </a:p>
+        </p:txBody>
+      </p:sp>
       <p:pic>
         <p:nvPicPr>
-          <p:cNvPr id="14" name="Picture 13" descr="check_steel.png"/>
+          <p:cNvPr id="17" name="Picture 16" descr="check_white.png"/>
           <p:cNvPicPr>
             <a:picLocks noChangeAspect="1"/>
           </p:cNvPicPr>
@@ -6905,8 +7000,8 @@
         </p:blipFill>
         <p:spPr>
           <a:xfrm>
-            <a:off x="987552" y="4023360"/>
-            <a:ext cx="237744" cy="237744"/>
+            <a:off x="1110447" y="3862791"/>
+            <a:ext cx="266273" cy="266273"/>
           </a:xfrm>
           <a:prstGeom prst="rect">
             <a:avLst/>
@@ -6915,14 +7010,14 @@
       </p:pic>
       <p:sp>
         <p:nvSpPr>
-          <p:cNvPr id="15" name="TextBox 14"/>
+          <p:cNvPr id="18" name="TextBox 17"/>
           <p:cNvSpPr txBox="1"/>
           <p:nvPr/>
         </p:nvSpPr>
         <p:spPr>
           <a:xfrm>
-            <a:off x="1353312" y="3877056"/>
-            <a:ext cx="5029200" cy="530352"/>
+            <a:off x="1627632" y="3602736"/>
+            <a:ext cx="4206240" cy="786384"/>
           </a:xfrm>
           <a:prstGeom prst="rect">
             <a:avLst/>
@@ -6947,7 +7042,7 @@
               </a:spcAft>
             </a:pPr>
             <a:r>
-              <a:rPr sz="1200" b="0">
+              <a:rPr sz="1150" b="0">
                 <a:solidFill>
                   <a:srgbClr val="1A1A1A"/>
                 </a:solidFill>
@@ -6960,18 +7055,18 @@
       </p:sp>
       <p:sp>
         <p:nvSpPr>
-          <p:cNvPr id="16" name="Rounded Rectangle 15"/>
+          <p:cNvPr id="19" name="Rounded Rectangle 18"/>
           <p:cNvSpPr/>
           <p:nvPr/>
         </p:nvSpPr>
         <p:spPr>
           <a:xfrm>
-            <a:off x="841248" y="4480560"/>
-            <a:ext cx="5715000" cy="530352"/>
+            <a:off x="6254496" y="3602736"/>
+            <a:ext cx="5138928" cy="786384"/>
           </a:xfrm>
           <a:prstGeom prst="roundRect">
             <a:avLst>
-              <a:gd name="adj" fmla="val 6000"/>
+              <a:gd name="adj" fmla="val 7000"/>
             </a:avLst>
           </a:prstGeom>
           <a:solidFill>
@@ -7006,9 +7101,55 @@
           </a:p>
         </p:txBody>
       </p:sp>
+      <p:sp>
+        <p:nvSpPr>
+          <p:cNvPr id="20" name="Rounded Rectangle 19"/>
+          <p:cNvSpPr/>
+          <p:nvPr/>
+        </p:nvSpPr>
+        <p:spPr>
+          <a:xfrm>
+            <a:off x="6400800" y="3739896"/>
+            <a:ext cx="512064" cy="512064"/>
+          </a:xfrm>
+          <a:prstGeom prst="roundRect">
+            <a:avLst>
+              <a:gd name="adj" fmla="val 26000"/>
+            </a:avLst>
+          </a:prstGeom>
+          <a:solidFill>
+            <a:srgbClr val="EE0000"/>
+          </a:solidFill>
+          <a:ln>
+            <a:noFill/>
+          </a:ln>
+          <a:effectLst/>
+        </p:spPr>
+        <p:style>
+          <a:lnRef idx="1">
+            <a:schemeClr val="accent1"/>
+          </a:lnRef>
+          <a:fillRef idx="3">
+            <a:schemeClr val="accent1"/>
+          </a:fillRef>
+          <a:effectRef idx="2">
+            <a:schemeClr val="accent1"/>
+          </a:effectRef>
+          <a:fontRef idx="minor">
+            <a:schemeClr val="lt1"/>
+          </a:fontRef>
+        </p:style>
+        <p:txBody>
+          <a:bodyPr rtlCol="0" anchor="ctr"/>
+          <a:lstStyle/>
+          <a:p>
+            <a:pPr algn="ctr"/>
+          </a:p>
+        </p:txBody>
+      </p:sp>
       <p:pic>
         <p:nvPicPr>
-          <p:cNvPr id="17" name="Picture 16" descr="check_steel.png"/>
+          <p:cNvPr id="21" name="Picture 20" descr="check_white.png"/>
           <p:cNvPicPr>
             <a:picLocks noChangeAspect="1"/>
           </p:cNvPicPr>
@@ -7022,8 +7163,8 @@
         </p:blipFill>
         <p:spPr>
           <a:xfrm>
-            <a:off x="987552" y="4626864"/>
-            <a:ext cx="237744" cy="237744"/>
+            <a:off x="6523695" y="3862791"/>
+            <a:ext cx="266273" cy="266273"/>
           </a:xfrm>
           <a:prstGeom prst="rect">
             <a:avLst/>
@@ -7032,14 +7173,14 @@
       </p:pic>
       <p:sp>
         <p:nvSpPr>
-          <p:cNvPr id="18" name="TextBox 17"/>
+          <p:cNvPr id="22" name="TextBox 21"/>
           <p:cNvSpPr txBox="1"/>
           <p:nvPr/>
         </p:nvSpPr>
         <p:spPr>
           <a:xfrm>
-            <a:off x="1353312" y="4480560"/>
-            <a:ext cx="5029200" cy="530352"/>
+            <a:off x="7040880" y="3602736"/>
+            <a:ext cx="4206240" cy="786384"/>
           </a:xfrm>
           <a:prstGeom prst="rect">
             <a:avLst/>
@@ -7064,7 +7205,7 @@
               </a:spcAft>
             </a:pPr>
             <a:r>
-              <a:rPr sz="1200" b="0">
+              <a:rPr sz="1150" b="0">
                 <a:solidFill>
                   <a:srgbClr val="1A1A1A"/>
                 </a:solidFill>
@@ -7077,18 +7218,18 @@
       </p:sp>
       <p:sp>
         <p:nvSpPr>
-          <p:cNvPr id="19" name="Rounded Rectangle 18"/>
+          <p:cNvPr id="23" name="Rounded Rectangle 22"/>
           <p:cNvSpPr/>
           <p:nvPr/>
         </p:nvSpPr>
         <p:spPr>
           <a:xfrm>
-            <a:off x="841248" y="5084064"/>
-            <a:ext cx="5715000" cy="530352"/>
+            <a:off x="841248" y="4535424"/>
+            <a:ext cx="5138928" cy="786384"/>
           </a:xfrm>
           <a:prstGeom prst="roundRect">
             <a:avLst>
-              <a:gd name="adj" fmla="val 6000"/>
+              <a:gd name="adj" fmla="val 7000"/>
             </a:avLst>
           </a:prstGeom>
           <a:solidFill>
@@ -7123,9 +7264,55 @@
           </a:p>
         </p:txBody>
       </p:sp>
+      <p:sp>
+        <p:nvSpPr>
+          <p:cNvPr id="24" name="Rounded Rectangle 23"/>
+          <p:cNvSpPr/>
+          <p:nvPr/>
+        </p:nvSpPr>
+        <p:spPr>
+          <a:xfrm>
+            <a:off x="987552" y="4672584"/>
+            <a:ext cx="512064" cy="512064"/>
+          </a:xfrm>
+          <a:prstGeom prst="roundRect">
+            <a:avLst>
+              <a:gd name="adj" fmla="val 26000"/>
+            </a:avLst>
+          </a:prstGeom>
+          <a:solidFill>
+            <a:srgbClr val="EE0000"/>
+          </a:solidFill>
+          <a:ln>
+            <a:noFill/>
+          </a:ln>
+          <a:effectLst/>
+        </p:spPr>
+        <p:style>
+          <a:lnRef idx="1">
+            <a:schemeClr val="accent1"/>
+          </a:lnRef>
+          <a:fillRef idx="3">
+            <a:schemeClr val="accent1"/>
+          </a:fillRef>
+          <a:effectRef idx="2">
+            <a:schemeClr val="accent1"/>
+          </a:effectRef>
+          <a:fontRef idx="minor">
+            <a:schemeClr val="lt1"/>
+          </a:fontRef>
+        </p:style>
+        <p:txBody>
+          <a:bodyPr rtlCol="0" anchor="ctr"/>
+          <a:lstStyle/>
+          <a:p>
+            <a:pPr algn="ctr"/>
+          </a:p>
+        </p:txBody>
+      </p:sp>
       <p:pic>
         <p:nvPicPr>
-          <p:cNvPr id="20" name="Picture 19" descr="check_steel.png"/>
+          <p:cNvPr id="25" name="Picture 24" descr="check_white.png"/>
           <p:cNvPicPr>
             <a:picLocks noChangeAspect="1"/>
           </p:cNvPicPr>
@@ -7139,8 +7326,8 @@
         </p:blipFill>
         <p:spPr>
           <a:xfrm>
-            <a:off x="987552" y="5230368"/>
-            <a:ext cx="237744" cy="237744"/>
+            <a:off x="1110447" y="4795479"/>
+            <a:ext cx="266273" cy="266273"/>
           </a:xfrm>
           <a:prstGeom prst="rect">
             <a:avLst/>
@@ -7149,14 +7336,14 @@
       </p:pic>
       <p:sp>
         <p:nvSpPr>
-          <p:cNvPr id="21" name="TextBox 20"/>
+          <p:cNvPr id="26" name="TextBox 25"/>
           <p:cNvSpPr txBox="1"/>
           <p:nvPr/>
         </p:nvSpPr>
         <p:spPr>
           <a:xfrm>
-            <a:off x="1353312" y="5084064"/>
-            <a:ext cx="5029200" cy="530352"/>
+            <a:off x="1627632" y="4535424"/>
+            <a:ext cx="4206240" cy="786384"/>
           </a:xfrm>
           <a:prstGeom prst="rect">
             <a:avLst/>
@@ -7181,221 +7368,13 @@
               </a:spcAft>
             </a:pPr>
             <a:r>
-              <a:rPr sz="1200" b="0">
+              <a:rPr sz="1150" b="0">
                 <a:solidFill>
                   <a:srgbClr val="1A1A1A"/>
                 </a:solidFill>
                 <a:latin typeface="Red Hat Text"/>
               </a:rPr>
               <a:t>Set the flags AND scope the identity: belt, suspenders, and a locked door</a:t>
-            </a:r>
-          </a:p>
-        </p:txBody>
-      </p:sp>
-      <p:sp>
-        <p:nvSpPr>
-          <p:cNvPr id="22" name="Rounded Rectangle 21"/>
-          <p:cNvSpPr/>
-          <p:nvPr/>
-        </p:nvSpPr>
-        <p:spPr>
-          <a:xfrm>
-            <a:off x="6812280" y="2670048"/>
-            <a:ext cx="4538167" cy="2944368"/>
-          </a:xfrm>
-          <a:prstGeom prst="roundRect">
-            <a:avLst>
-              <a:gd name="adj" fmla="val 4000"/>
-            </a:avLst>
-          </a:prstGeom>
-          <a:solidFill>
-            <a:srgbClr val="FFFFFF"/>
-          </a:solidFill>
-          <a:ln w="15240">
-            <a:solidFill>
-              <a:srgbClr val="DDE1E6"/>
-            </a:solidFill>
-          </a:ln>
-          <a:effectLst/>
-        </p:spPr>
-        <p:style>
-          <a:lnRef idx="1">
-            <a:schemeClr val="accent1"/>
-          </a:lnRef>
-          <a:fillRef idx="3">
-            <a:schemeClr val="accent1"/>
-          </a:fillRef>
-          <a:effectRef idx="2">
-            <a:schemeClr val="accent1"/>
-          </a:effectRef>
-          <a:fontRef idx="minor">
-            <a:schemeClr val="lt1"/>
-          </a:fontRef>
-        </p:style>
-        <p:txBody>
-          <a:bodyPr rtlCol="0" anchor="ctr"/>
-          <a:lstStyle/>
-          <a:p>
-            <a:pPr algn="ctr"/>
-          </a:p>
-        </p:txBody>
-      </p:sp>
-      <p:sp>
-        <p:nvSpPr>
-          <p:cNvPr id="23" name="Rounded Rectangle 22"/>
-          <p:cNvSpPr/>
-          <p:nvPr/>
-        </p:nvSpPr>
-        <p:spPr>
-          <a:xfrm>
-            <a:off x="7013448" y="2871216"/>
-            <a:ext cx="1298448" cy="310896"/>
-          </a:xfrm>
-          <a:prstGeom prst="roundRect">
-            <a:avLst>
-              <a:gd name="adj" fmla="val 50000"/>
-            </a:avLst>
-          </a:prstGeom>
-          <a:solidFill>
-            <a:srgbClr val="FCECEC"/>
-          </a:solidFill>
-          <a:ln>
-            <a:noFill/>
-          </a:ln>
-          <a:effectLst/>
-        </p:spPr>
-        <p:style>
-          <a:lnRef idx="1">
-            <a:schemeClr val="accent1"/>
-          </a:lnRef>
-          <a:fillRef idx="3">
-            <a:schemeClr val="accent1"/>
-          </a:fillRef>
-          <a:effectRef idx="2">
-            <a:schemeClr val="accent1"/>
-          </a:effectRef>
-          <a:fontRef idx="minor">
-            <a:schemeClr val="lt1"/>
-          </a:fontRef>
-        </p:style>
-        <p:txBody>
-          <a:bodyPr rtlCol="0" anchor="ctr"/>
-          <a:lstStyle/>
-          <a:p>
-            <a:pPr algn="ctr"/>
-          </a:p>
-        </p:txBody>
-      </p:sp>
-      <p:sp>
-        <p:nvSpPr>
-          <p:cNvPr id="24" name="TextBox 23"/>
-          <p:cNvSpPr txBox="1"/>
-          <p:nvPr/>
-        </p:nvSpPr>
-        <p:spPr>
-          <a:xfrm>
-            <a:off x="7013448" y="2871216"/>
-            <a:ext cx="1298448" cy="310896"/>
-          </a:xfrm>
-          <a:prstGeom prst="rect">
-            <a:avLst/>
-          </a:prstGeom>
-          <a:noFill/>
-        </p:spPr>
-        <p:txBody>
-          <a:bodyPr wrap="none" anchor="ctr" lIns="0" rIns="0" tIns="0" bIns="0">
-            <a:spAutoFit/>
-          </a:bodyPr>
-          <a:lstStyle/>
-          <a:p>
-            <a:pPr algn="ctr">
-              <a:lnSpc>
-                <a:spcPct val="106000"/>
-              </a:lnSpc>
-              <a:spcBef>
-                <a:spcPts val="0"/>
-              </a:spcBef>
-              <a:spcAft>
-                <a:spcPts val="0"/>
-              </a:spcAft>
-            </a:pPr>
-            <a:r>
-              <a:rPr sz="850" b="1">
-                <a:solidFill>
-                  <a:srgbClr val="B80000"/>
-                </a:solidFill>
-                <a:latin typeface="Red Hat Display"/>
-              </a:rPr>
-              <a:t>MEDIA PASS</a:t>
-            </a:r>
-          </a:p>
-        </p:txBody>
-      </p:sp>
-      <p:pic>
-        <p:nvPicPr>
-          <p:cNvPr id="25" name="Picture 24" descr="eye_slate.png"/>
-          <p:cNvPicPr>
-            <a:picLocks noChangeAspect="1"/>
-          </p:cNvPicPr>
-          <p:nvPr/>
-        </p:nvPicPr>
-        <p:blipFill>
-          <a:blip r:embed="rId4"/>
-          <a:stretch>
-            <a:fillRect/>
-          </a:stretch>
-        </p:blipFill>
-        <p:spPr>
-          <a:xfrm>
-            <a:off x="8843619" y="3383280"/>
-            <a:ext cx="475488" cy="475488"/>
-          </a:xfrm>
-          <a:prstGeom prst="rect">
-            <a:avLst/>
-          </a:prstGeom>
-        </p:spPr>
-      </p:pic>
-      <p:sp>
-        <p:nvSpPr>
-          <p:cNvPr id="26" name="TextBox 25"/>
-          <p:cNvSpPr txBox="1"/>
-          <p:nvPr/>
-        </p:nvSpPr>
-        <p:spPr>
-          <a:xfrm>
-            <a:off x="7050024" y="3995928"/>
-            <a:ext cx="4062679" cy="1481328"/>
-          </a:xfrm>
-          <a:prstGeom prst="rect">
-            <a:avLst/>
-          </a:prstGeom>
-          <a:noFill/>
-        </p:spPr>
-        <p:txBody>
-          <a:bodyPr wrap="square" anchor="t" lIns="0" rIns="0" tIns="0" bIns="0">
-            <a:spAutoFit/>
-          </a:bodyPr>
-          <a:lstStyle/>
-          <a:p>
-            <a:pPr algn="l">
-              <a:lnSpc>
-                <a:spcPct val="120000"/>
-              </a:lnSpc>
-              <a:spcBef>
-                <a:spcPts val="0"/>
-              </a:spcBef>
-              <a:spcAft>
-                <a:spcPts val="0"/>
-              </a:spcAft>
-            </a:pPr>
-            <a:r>
-              <a:rPr sz="950" b="0">
-                <a:solidFill>
-                  <a:srgbClr val="8A9099"/>
-                </a:solidFill>
-                <a:latin typeface="Red Hat Text"/>
-              </a:rPr>
-              <a:t>Two seatbelts (labeled "server --read-only" and "client filter") drawn as thin dashed lines, and behind them a solid vault door labeled "RBAC on mcp-agent (API server enforced)". A small "CVE-2026-46519: seatbelt unbuckled → door still locked" caption.</a:t>
             </a:r>
           </a:p>
         </p:txBody>
@@ -7748,11 +7727,11 @@
         <p:spPr>
           <a:xfrm>
             <a:off x="841248" y="2670048"/>
-            <a:ext cx="5715000" cy="530352"/>
+            <a:ext cx="5138928" cy="786384"/>
           </a:xfrm>
           <a:prstGeom prst="roundRect">
             <a:avLst>
-              <a:gd name="adj" fmla="val 6000"/>
+              <a:gd name="adj" fmla="val 7000"/>
             </a:avLst>
           </a:prstGeom>
           <a:solidFill>
@@ -7787,9 +7766,55 @@
           </a:p>
         </p:txBody>
       </p:sp>
+      <p:sp>
+        <p:nvSpPr>
+          <p:cNvPr id="8" name="Rounded Rectangle 7"/>
+          <p:cNvSpPr/>
+          <p:nvPr/>
+        </p:nvSpPr>
+        <p:spPr>
+          <a:xfrm>
+            <a:off x="987552" y="2807208"/>
+            <a:ext cx="512064" cy="512064"/>
+          </a:xfrm>
+          <a:prstGeom prst="roundRect">
+            <a:avLst>
+              <a:gd name="adj" fmla="val 26000"/>
+            </a:avLst>
+          </a:prstGeom>
+          <a:solidFill>
+            <a:srgbClr val="EE0000"/>
+          </a:solidFill>
+          <a:ln>
+            <a:noFill/>
+          </a:ln>
+          <a:effectLst/>
+        </p:spPr>
+        <p:style>
+          <a:lnRef idx="1">
+            <a:schemeClr val="accent1"/>
+          </a:lnRef>
+          <a:fillRef idx="3">
+            <a:schemeClr val="accent1"/>
+          </a:fillRef>
+          <a:effectRef idx="2">
+            <a:schemeClr val="accent1"/>
+          </a:effectRef>
+          <a:fontRef idx="minor">
+            <a:schemeClr val="lt1"/>
+          </a:fontRef>
+        </p:style>
+        <p:txBody>
+          <a:bodyPr rtlCol="0" anchor="ctr"/>
+          <a:lstStyle/>
+          <a:p>
+            <a:pPr algn="ctr"/>
+          </a:p>
+        </p:txBody>
+      </p:sp>
       <p:pic>
         <p:nvPicPr>
-          <p:cNvPr id="8" name="Picture 7" descr="check_steel.png"/>
+          <p:cNvPr id="9" name="Picture 8" descr="check_white.png"/>
           <p:cNvPicPr>
             <a:picLocks noChangeAspect="1"/>
           </p:cNvPicPr>
@@ -7803,8 +7828,8 @@
         </p:blipFill>
         <p:spPr>
           <a:xfrm>
-            <a:off x="987552" y="2816352"/>
-            <a:ext cx="237744" cy="237744"/>
+            <a:off x="1110447" y="2930103"/>
+            <a:ext cx="266273" cy="266273"/>
           </a:xfrm>
           <a:prstGeom prst="rect">
             <a:avLst/>
@@ -7813,14 +7838,14 @@
       </p:pic>
       <p:sp>
         <p:nvSpPr>
-          <p:cNvPr id="9" name="TextBox 8"/>
+          <p:cNvPr id="10" name="TextBox 9"/>
           <p:cNvSpPr txBox="1"/>
           <p:nvPr/>
         </p:nvSpPr>
         <p:spPr>
           <a:xfrm>
-            <a:off x="1353312" y="2670048"/>
-            <a:ext cx="5029200" cy="530352"/>
+            <a:off x="1627632" y="2670048"/>
+            <a:ext cx="4206240" cy="786384"/>
           </a:xfrm>
           <a:prstGeom prst="rect">
             <a:avLst/>
@@ -7845,7 +7870,7 @@
               </a:spcAft>
             </a:pPr>
             <a:r>
-              <a:rPr sz="1200" b="0">
+              <a:rPr sz="1150" b="0">
                 <a:solidFill>
                   <a:srgbClr val="1A1A1A"/>
                 </a:solidFill>
@@ -7858,18 +7883,18 @@
       </p:sp>
       <p:sp>
         <p:nvSpPr>
-          <p:cNvPr id="10" name="Rounded Rectangle 9"/>
+          <p:cNvPr id="11" name="Rounded Rectangle 10"/>
           <p:cNvSpPr/>
           <p:nvPr/>
         </p:nvSpPr>
         <p:spPr>
           <a:xfrm>
-            <a:off x="841248" y="3273552"/>
-            <a:ext cx="5715000" cy="530352"/>
+            <a:off x="6254496" y="2670048"/>
+            <a:ext cx="5138928" cy="786384"/>
           </a:xfrm>
           <a:prstGeom prst="roundRect">
             <a:avLst>
-              <a:gd name="adj" fmla="val 6000"/>
+              <a:gd name="adj" fmla="val 7000"/>
             </a:avLst>
           </a:prstGeom>
           <a:solidFill>
@@ -7904,9 +7929,55 @@
           </a:p>
         </p:txBody>
       </p:sp>
+      <p:sp>
+        <p:nvSpPr>
+          <p:cNvPr id="12" name="Rounded Rectangle 11"/>
+          <p:cNvSpPr/>
+          <p:nvPr/>
+        </p:nvSpPr>
+        <p:spPr>
+          <a:xfrm>
+            <a:off x="6400800" y="2807208"/>
+            <a:ext cx="512064" cy="512064"/>
+          </a:xfrm>
+          <a:prstGeom prst="roundRect">
+            <a:avLst>
+              <a:gd name="adj" fmla="val 26000"/>
+            </a:avLst>
+          </a:prstGeom>
+          <a:solidFill>
+            <a:srgbClr val="EE0000"/>
+          </a:solidFill>
+          <a:ln>
+            <a:noFill/>
+          </a:ln>
+          <a:effectLst/>
+        </p:spPr>
+        <p:style>
+          <a:lnRef idx="1">
+            <a:schemeClr val="accent1"/>
+          </a:lnRef>
+          <a:fillRef idx="3">
+            <a:schemeClr val="accent1"/>
+          </a:fillRef>
+          <a:effectRef idx="2">
+            <a:schemeClr val="accent1"/>
+          </a:effectRef>
+          <a:fontRef idx="minor">
+            <a:schemeClr val="lt1"/>
+          </a:fontRef>
+        </p:style>
+        <p:txBody>
+          <a:bodyPr rtlCol="0" anchor="ctr"/>
+          <a:lstStyle/>
+          <a:p>
+            <a:pPr algn="ctr"/>
+          </a:p>
+        </p:txBody>
+      </p:sp>
       <p:pic>
         <p:nvPicPr>
-          <p:cNvPr id="11" name="Picture 10" descr="check_steel.png"/>
+          <p:cNvPr id="13" name="Picture 12" descr="check_white.png"/>
           <p:cNvPicPr>
             <a:picLocks noChangeAspect="1"/>
           </p:cNvPicPr>
@@ -7920,8 +7991,8 @@
         </p:blipFill>
         <p:spPr>
           <a:xfrm>
-            <a:off x="987552" y="3419856"/>
-            <a:ext cx="237744" cy="237744"/>
+            <a:off x="6523695" y="2930103"/>
+            <a:ext cx="266273" cy="266273"/>
           </a:xfrm>
           <a:prstGeom prst="rect">
             <a:avLst/>
@@ -7930,14 +8001,14 @@
       </p:pic>
       <p:sp>
         <p:nvSpPr>
-          <p:cNvPr id="12" name="TextBox 11"/>
+          <p:cNvPr id="14" name="TextBox 13"/>
           <p:cNvSpPr txBox="1"/>
           <p:nvPr/>
         </p:nvSpPr>
         <p:spPr>
           <a:xfrm>
-            <a:off x="1353312" y="3273552"/>
-            <a:ext cx="5029200" cy="530352"/>
+            <a:off x="7040880" y="2670048"/>
+            <a:ext cx="4206240" cy="786384"/>
           </a:xfrm>
           <a:prstGeom prst="rect">
             <a:avLst/>
@@ -7962,7 +8033,7 @@
               </a:spcAft>
             </a:pPr>
             <a:r>
-              <a:rPr sz="1200" b="0">
+              <a:rPr sz="1150" b="0">
                 <a:solidFill>
                   <a:srgbClr val="1A1A1A"/>
                 </a:solidFill>
@@ -7975,18 +8046,18 @@
       </p:sp>
       <p:sp>
         <p:nvSpPr>
-          <p:cNvPr id="13" name="Rounded Rectangle 12"/>
+          <p:cNvPr id="15" name="Rounded Rectangle 14"/>
           <p:cNvSpPr/>
           <p:nvPr/>
         </p:nvSpPr>
         <p:spPr>
           <a:xfrm>
-            <a:off x="841248" y="3877056"/>
-            <a:ext cx="5715000" cy="530352"/>
+            <a:off x="841248" y="3602736"/>
+            <a:ext cx="5138928" cy="786384"/>
           </a:xfrm>
           <a:prstGeom prst="roundRect">
             <a:avLst>
-              <a:gd name="adj" fmla="val 6000"/>
+              <a:gd name="adj" fmla="val 7000"/>
             </a:avLst>
           </a:prstGeom>
           <a:solidFill>
@@ -8021,9 +8092,55 @@
           </a:p>
         </p:txBody>
       </p:sp>
+      <p:sp>
+        <p:nvSpPr>
+          <p:cNvPr id="16" name="Rounded Rectangle 15"/>
+          <p:cNvSpPr/>
+          <p:nvPr/>
+        </p:nvSpPr>
+        <p:spPr>
+          <a:xfrm>
+            <a:off x="987552" y="3739896"/>
+            <a:ext cx="512064" cy="512064"/>
+          </a:xfrm>
+          <a:prstGeom prst="roundRect">
+            <a:avLst>
+              <a:gd name="adj" fmla="val 26000"/>
+            </a:avLst>
+          </a:prstGeom>
+          <a:solidFill>
+            <a:srgbClr val="EE0000"/>
+          </a:solidFill>
+          <a:ln>
+            <a:noFill/>
+          </a:ln>
+          <a:effectLst/>
+        </p:spPr>
+        <p:style>
+          <a:lnRef idx="1">
+            <a:schemeClr val="accent1"/>
+          </a:lnRef>
+          <a:fillRef idx="3">
+            <a:schemeClr val="accent1"/>
+          </a:fillRef>
+          <a:effectRef idx="2">
+            <a:schemeClr val="accent1"/>
+          </a:effectRef>
+          <a:fontRef idx="minor">
+            <a:schemeClr val="lt1"/>
+          </a:fontRef>
+        </p:style>
+        <p:txBody>
+          <a:bodyPr rtlCol="0" anchor="ctr"/>
+          <a:lstStyle/>
+          <a:p>
+            <a:pPr algn="ctr"/>
+          </a:p>
+        </p:txBody>
+      </p:sp>
       <p:pic>
         <p:nvPicPr>
-          <p:cNvPr id="14" name="Picture 13" descr="check_steel.png"/>
+          <p:cNvPr id="17" name="Picture 16" descr="check_white.png"/>
           <p:cNvPicPr>
             <a:picLocks noChangeAspect="1"/>
           </p:cNvPicPr>
@@ -8037,8 +8154,8 @@
         </p:blipFill>
         <p:spPr>
           <a:xfrm>
-            <a:off x="987552" y="4023360"/>
-            <a:ext cx="237744" cy="237744"/>
+            <a:off x="1110447" y="3862791"/>
+            <a:ext cx="266273" cy="266273"/>
           </a:xfrm>
           <a:prstGeom prst="rect">
             <a:avLst/>
@@ -8047,14 +8164,14 @@
       </p:pic>
       <p:sp>
         <p:nvSpPr>
-          <p:cNvPr id="15" name="TextBox 14"/>
+          <p:cNvPr id="18" name="TextBox 17"/>
           <p:cNvSpPr txBox="1"/>
           <p:nvPr/>
         </p:nvSpPr>
         <p:spPr>
           <a:xfrm>
-            <a:off x="1353312" y="3877056"/>
-            <a:ext cx="5029200" cy="530352"/>
+            <a:off x="1627632" y="3602736"/>
+            <a:ext cx="4206240" cy="786384"/>
           </a:xfrm>
           <a:prstGeom prst="rect">
             <a:avLst/>
@@ -8079,7 +8196,7 @@
               </a:spcAft>
             </a:pPr>
             <a:r>
-              <a:rPr sz="1200" b="0">
+              <a:rPr sz="1150" b="0">
                 <a:solidFill>
                   <a:srgbClr val="1A1A1A"/>
                 </a:solidFill>
@@ -8092,18 +8209,18 @@
       </p:sp>
       <p:sp>
         <p:nvSpPr>
-          <p:cNvPr id="16" name="Rounded Rectangle 15"/>
+          <p:cNvPr id="19" name="Rounded Rectangle 18"/>
           <p:cNvSpPr/>
           <p:nvPr/>
         </p:nvSpPr>
         <p:spPr>
           <a:xfrm>
-            <a:off x="841248" y="4480560"/>
-            <a:ext cx="5715000" cy="530352"/>
+            <a:off x="6254496" y="3602736"/>
+            <a:ext cx="5138928" cy="786384"/>
           </a:xfrm>
           <a:prstGeom prst="roundRect">
             <a:avLst>
-              <a:gd name="adj" fmla="val 6000"/>
+              <a:gd name="adj" fmla="val 7000"/>
             </a:avLst>
           </a:prstGeom>
           <a:solidFill>
@@ -8138,9 +8255,55 @@
           </a:p>
         </p:txBody>
       </p:sp>
+      <p:sp>
+        <p:nvSpPr>
+          <p:cNvPr id="20" name="Rounded Rectangle 19"/>
+          <p:cNvSpPr/>
+          <p:nvPr/>
+        </p:nvSpPr>
+        <p:spPr>
+          <a:xfrm>
+            <a:off x="6400800" y="3739896"/>
+            <a:ext cx="512064" cy="512064"/>
+          </a:xfrm>
+          <a:prstGeom prst="roundRect">
+            <a:avLst>
+              <a:gd name="adj" fmla="val 26000"/>
+            </a:avLst>
+          </a:prstGeom>
+          <a:solidFill>
+            <a:srgbClr val="EE0000"/>
+          </a:solidFill>
+          <a:ln>
+            <a:noFill/>
+          </a:ln>
+          <a:effectLst/>
+        </p:spPr>
+        <p:style>
+          <a:lnRef idx="1">
+            <a:schemeClr val="accent1"/>
+          </a:lnRef>
+          <a:fillRef idx="3">
+            <a:schemeClr val="accent1"/>
+          </a:fillRef>
+          <a:effectRef idx="2">
+            <a:schemeClr val="accent1"/>
+          </a:effectRef>
+          <a:fontRef idx="minor">
+            <a:schemeClr val="lt1"/>
+          </a:fontRef>
+        </p:style>
+        <p:txBody>
+          <a:bodyPr rtlCol="0" anchor="ctr"/>
+          <a:lstStyle/>
+          <a:p>
+            <a:pPr algn="ctr"/>
+          </a:p>
+        </p:txBody>
+      </p:sp>
       <p:pic>
         <p:nvPicPr>
-          <p:cNvPr id="17" name="Picture 16" descr="check_steel.png"/>
+          <p:cNvPr id="21" name="Picture 20" descr="check_white.png"/>
           <p:cNvPicPr>
             <a:picLocks noChangeAspect="1"/>
           </p:cNvPicPr>
@@ -8154,8 +8317,8 @@
         </p:blipFill>
         <p:spPr>
           <a:xfrm>
-            <a:off x="987552" y="4626864"/>
-            <a:ext cx="237744" cy="237744"/>
+            <a:off x="6523695" y="3862791"/>
+            <a:ext cx="266273" cy="266273"/>
           </a:xfrm>
           <a:prstGeom prst="rect">
             <a:avLst/>
@@ -8164,14 +8327,14 @@
       </p:pic>
       <p:sp>
         <p:nvSpPr>
-          <p:cNvPr id="18" name="TextBox 17"/>
+          <p:cNvPr id="22" name="TextBox 21"/>
           <p:cNvSpPr txBox="1"/>
           <p:nvPr/>
         </p:nvSpPr>
         <p:spPr>
           <a:xfrm>
-            <a:off x="1353312" y="4480560"/>
-            <a:ext cx="5029200" cy="530352"/>
+            <a:off x="7040880" y="3602736"/>
+            <a:ext cx="4206240" cy="786384"/>
           </a:xfrm>
           <a:prstGeom prst="rect">
             <a:avLst/>
@@ -8196,7 +8359,7 @@
               </a:spcAft>
             </a:pPr>
             <a:r>
-              <a:rPr sz="1200" b="0">
+              <a:rPr sz="1150" b="0">
                 <a:solidFill>
                   <a:srgbClr val="1A1A1A"/>
                 </a:solidFill>
@@ -8209,18 +8372,18 @@
       </p:sp>
       <p:sp>
         <p:nvSpPr>
-          <p:cNvPr id="19" name="Rounded Rectangle 18"/>
+          <p:cNvPr id="23" name="Rounded Rectangle 22"/>
           <p:cNvSpPr/>
           <p:nvPr/>
         </p:nvSpPr>
         <p:spPr>
           <a:xfrm>
-            <a:off x="841248" y="5084064"/>
-            <a:ext cx="5715000" cy="530352"/>
+            <a:off x="841248" y="4535424"/>
+            <a:ext cx="5138928" cy="786384"/>
           </a:xfrm>
           <a:prstGeom prst="roundRect">
             <a:avLst>
-              <a:gd name="adj" fmla="val 6000"/>
+              <a:gd name="adj" fmla="val 7000"/>
             </a:avLst>
           </a:prstGeom>
           <a:solidFill>
@@ -8255,9 +8418,55 @@
           </a:p>
         </p:txBody>
       </p:sp>
+      <p:sp>
+        <p:nvSpPr>
+          <p:cNvPr id="24" name="Rounded Rectangle 23"/>
+          <p:cNvSpPr/>
+          <p:nvPr/>
+        </p:nvSpPr>
+        <p:spPr>
+          <a:xfrm>
+            <a:off x="987552" y="4672584"/>
+            <a:ext cx="512064" cy="512064"/>
+          </a:xfrm>
+          <a:prstGeom prst="roundRect">
+            <a:avLst>
+              <a:gd name="adj" fmla="val 26000"/>
+            </a:avLst>
+          </a:prstGeom>
+          <a:solidFill>
+            <a:srgbClr val="EE0000"/>
+          </a:solidFill>
+          <a:ln>
+            <a:noFill/>
+          </a:ln>
+          <a:effectLst/>
+        </p:spPr>
+        <p:style>
+          <a:lnRef idx="1">
+            <a:schemeClr val="accent1"/>
+          </a:lnRef>
+          <a:fillRef idx="3">
+            <a:schemeClr val="accent1"/>
+          </a:fillRef>
+          <a:effectRef idx="2">
+            <a:schemeClr val="accent1"/>
+          </a:effectRef>
+          <a:fontRef idx="minor">
+            <a:schemeClr val="lt1"/>
+          </a:fontRef>
+        </p:style>
+        <p:txBody>
+          <a:bodyPr rtlCol="0" anchor="ctr"/>
+          <a:lstStyle/>
+          <a:p>
+            <a:pPr algn="ctr"/>
+          </a:p>
+        </p:txBody>
+      </p:sp>
       <p:pic>
         <p:nvPicPr>
-          <p:cNvPr id="20" name="Picture 19" descr="check_steel.png"/>
+          <p:cNvPr id="25" name="Picture 24" descr="check_white.png"/>
           <p:cNvPicPr>
             <a:picLocks noChangeAspect="1"/>
           </p:cNvPicPr>
@@ -8271,8 +8480,8 @@
         </p:blipFill>
         <p:spPr>
           <a:xfrm>
-            <a:off x="987552" y="5230368"/>
-            <a:ext cx="237744" cy="237744"/>
+            <a:off x="1110447" y="4795479"/>
+            <a:ext cx="266273" cy="266273"/>
           </a:xfrm>
           <a:prstGeom prst="rect">
             <a:avLst/>
@@ -8281,14 +8490,14 @@
       </p:pic>
       <p:sp>
         <p:nvSpPr>
-          <p:cNvPr id="21" name="TextBox 20"/>
+          <p:cNvPr id="26" name="TextBox 25"/>
           <p:cNvSpPr txBox="1"/>
           <p:nvPr/>
         </p:nvSpPr>
         <p:spPr>
           <a:xfrm>
-            <a:off x="1353312" y="5084064"/>
-            <a:ext cx="5029200" cy="530352"/>
+            <a:off x="1627632" y="4535424"/>
+            <a:ext cx="4206240" cy="786384"/>
           </a:xfrm>
           <a:prstGeom prst="rect">
             <a:avLst/>
@@ -8313,221 +8522,13 @@
               </a:spcAft>
             </a:pPr>
             <a:r>
-              <a:rPr sz="1200" b="0">
+              <a:rPr sz="1150" b="0">
                 <a:solidFill>
                   <a:srgbClr val="1A1A1A"/>
                 </a:solidFill>
                 <a:latin typeface="Red Hat Text"/>
               </a:rPr>
               <a:t>Grounding is engineered: terse prompts make some models narrate a tool call as text instead of running it</a:t>
-            </a:r>
-          </a:p>
-        </p:txBody>
-      </p:sp>
-      <p:sp>
-        <p:nvSpPr>
-          <p:cNvPr id="22" name="Rounded Rectangle 21"/>
-          <p:cNvSpPr/>
-          <p:nvPr/>
-        </p:nvSpPr>
-        <p:spPr>
-          <a:xfrm>
-            <a:off x="6812280" y="2670048"/>
-            <a:ext cx="4538167" cy="2944368"/>
-          </a:xfrm>
-          <a:prstGeom prst="roundRect">
-            <a:avLst>
-              <a:gd name="adj" fmla="val 4000"/>
-            </a:avLst>
-          </a:prstGeom>
-          <a:solidFill>
-            <a:srgbClr val="FFFFFF"/>
-          </a:solidFill>
-          <a:ln w="15240">
-            <a:solidFill>
-              <a:srgbClr val="DDE1E6"/>
-            </a:solidFill>
-          </a:ln>
-          <a:effectLst/>
-        </p:spPr>
-        <p:style>
-          <a:lnRef idx="1">
-            <a:schemeClr val="accent1"/>
-          </a:lnRef>
-          <a:fillRef idx="3">
-            <a:schemeClr val="accent1"/>
-          </a:fillRef>
-          <a:effectRef idx="2">
-            <a:schemeClr val="accent1"/>
-          </a:effectRef>
-          <a:fontRef idx="minor">
-            <a:schemeClr val="lt1"/>
-          </a:fontRef>
-        </p:style>
-        <p:txBody>
-          <a:bodyPr rtlCol="0" anchor="ctr"/>
-          <a:lstStyle/>
-          <a:p>
-            <a:pPr algn="ctr"/>
-          </a:p>
-        </p:txBody>
-      </p:sp>
-      <p:sp>
-        <p:nvSpPr>
-          <p:cNvPr id="23" name="Rounded Rectangle 22"/>
-          <p:cNvSpPr/>
-          <p:nvPr/>
-        </p:nvSpPr>
-        <p:spPr>
-          <a:xfrm>
-            <a:off x="7013448" y="2871216"/>
-            <a:ext cx="1298448" cy="310896"/>
-          </a:xfrm>
-          <a:prstGeom prst="roundRect">
-            <a:avLst>
-              <a:gd name="adj" fmla="val 50000"/>
-            </a:avLst>
-          </a:prstGeom>
-          <a:solidFill>
-            <a:srgbClr val="FCECEC"/>
-          </a:solidFill>
-          <a:ln>
-            <a:noFill/>
-          </a:ln>
-          <a:effectLst/>
-        </p:spPr>
-        <p:style>
-          <a:lnRef idx="1">
-            <a:schemeClr val="accent1"/>
-          </a:lnRef>
-          <a:fillRef idx="3">
-            <a:schemeClr val="accent1"/>
-          </a:fillRef>
-          <a:effectRef idx="2">
-            <a:schemeClr val="accent1"/>
-          </a:effectRef>
-          <a:fontRef idx="minor">
-            <a:schemeClr val="lt1"/>
-          </a:fontRef>
-        </p:style>
-        <p:txBody>
-          <a:bodyPr rtlCol="0" anchor="ctr"/>
-          <a:lstStyle/>
-          <a:p>
-            <a:pPr algn="ctr"/>
-          </a:p>
-        </p:txBody>
-      </p:sp>
-      <p:sp>
-        <p:nvSpPr>
-          <p:cNvPr id="24" name="TextBox 23"/>
-          <p:cNvSpPr txBox="1"/>
-          <p:nvPr/>
-        </p:nvSpPr>
-        <p:spPr>
-          <a:xfrm>
-            <a:off x="7013448" y="2871216"/>
-            <a:ext cx="1298448" cy="310896"/>
-          </a:xfrm>
-          <a:prstGeom prst="rect">
-            <a:avLst/>
-          </a:prstGeom>
-          <a:noFill/>
-        </p:spPr>
-        <p:txBody>
-          <a:bodyPr wrap="none" anchor="ctr" lIns="0" rIns="0" tIns="0" bIns="0">
-            <a:spAutoFit/>
-          </a:bodyPr>
-          <a:lstStyle/>
-          <a:p>
-            <a:pPr algn="ctr">
-              <a:lnSpc>
-                <a:spcPct val="106000"/>
-              </a:lnSpc>
-              <a:spcBef>
-                <a:spcPts val="0"/>
-              </a:spcBef>
-              <a:spcAft>
-                <a:spcPts val="0"/>
-              </a:spcAft>
-            </a:pPr>
-            <a:r>
-              <a:rPr sz="850" b="1">
-                <a:solidFill>
-                  <a:srgbClr val="B80000"/>
-                </a:solidFill>
-                <a:latin typeface="Red Hat Display"/>
-              </a:rPr>
-              <a:t>MEDIA PASS</a:t>
-            </a:r>
-          </a:p>
-        </p:txBody>
-      </p:sp>
-      <p:pic>
-        <p:nvPicPr>
-          <p:cNvPr id="25" name="Picture 24" descr="eye_slate.png"/>
-          <p:cNvPicPr>
-            <a:picLocks noChangeAspect="1"/>
-          </p:cNvPicPr>
-          <p:nvPr/>
-        </p:nvPicPr>
-        <p:blipFill>
-          <a:blip r:embed="rId4"/>
-          <a:stretch>
-            <a:fillRect/>
-          </a:stretch>
-        </p:blipFill>
-        <p:spPr>
-          <a:xfrm>
-            <a:off x="8843619" y="3383280"/>
-            <a:ext cx="475488" cy="475488"/>
-          </a:xfrm>
-          <a:prstGeom prst="rect">
-            <a:avLst/>
-          </a:prstGeom>
-        </p:spPr>
-      </p:pic>
-      <p:sp>
-        <p:nvSpPr>
-          <p:cNvPr id="26" name="TextBox 25"/>
-          <p:cNvSpPr txBox="1"/>
-          <p:nvPr/>
-        </p:nvSpPr>
-        <p:spPr>
-          <a:xfrm>
-            <a:off x="7050024" y="3995928"/>
-            <a:ext cx="4062679" cy="1481328"/>
-          </a:xfrm>
-          <a:prstGeom prst="rect">
-            <a:avLst/>
-          </a:prstGeom>
-          <a:noFill/>
-        </p:spPr>
-        <p:txBody>
-          <a:bodyPr wrap="square" anchor="t" lIns="0" rIns="0" tIns="0" bIns="0">
-            <a:spAutoFit/>
-          </a:bodyPr>
-          <a:lstStyle/>
-          <a:p>
-            <a:pPr algn="l">
-              <a:lnSpc>
-                <a:spcPct val="120000"/>
-              </a:lnSpc>
-              <a:spcBef>
-                <a:spcPts val="0"/>
-              </a:spcBef>
-              <a:spcAft>
-                <a:spcPts val="0"/>
-              </a:spcAft>
-            </a:pPr>
-            <a:r>
-              <a:rPr sz="950" b="0">
-                <a:solidFill>
-                  <a:srgbClr val="8A9099"/>
-                </a:solidFill>
-                <a:latin typeface="Red Hat Text"/>
-              </a:rPr>
-              <a:t>A terminal showing the TOOL-CALL TRACE (3 calls) block, with a green check beside the answer and a second panel showing the matching `oc get ... /q/health/reddy` + the 404 event — "the agent's claim, verified."</a:t>
             </a:r>
           </a:p>
         </p:txBody>
@@ -8880,11 +8881,11 @@
         <p:spPr>
           <a:xfrm>
             <a:off x="841248" y="2670048"/>
-            <a:ext cx="5715000" cy="530352"/>
+            <a:ext cx="5138928" cy="786384"/>
           </a:xfrm>
           <a:prstGeom prst="roundRect">
             <a:avLst>
-              <a:gd name="adj" fmla="val 6000"/>
+              <a:gd name="adj" fmla="val 7000"/>
             </a:avLst>
           </a:prstGeom>
           <a:solidFill>
@@ -8919,9 +8920,55 @@
           </a:p>
         </p:txBody>
       </p:sp>
+      <p:sp>
+        <p:nvSpPr>
+          <p:cNvPr id="8" name="Rounded Rectangle 7"/>
+          <p:cNvSpPr/>
+          <p:nvPr/>
+        </p:nvSpPr>
+        <p:spPr>
+          <a:xfrm>
+            <a:off x="987552" y="2807208"/>
+            <a:ext cx="512064" cy="512064"/>
+          </a:xfrm>
+          <a:prstGeom prst="roundRect">
+            <a:avLst>
+              <a:gd name="adj" fmla="val 26000"/>
+            </a:avLst>
+          </a:prstGeom>
+          <a:solidFill>
+            <a:srgbClr val="EE0000"/>
+          </a:solidFill>
+          <a:ln>
+            <a:noFill/>
+          </a:ln>
+          <a:effectLst/>
+        </p:spPr>
+        <p:style>
+          <a:lnRef idx="1">
+            <a:schemeClr val="accent1"/>
+          </a:lnRef>
+          <a:fillRef idx="3">
+            <a:schemeClr val="accent1"/>
+          </a:fillRef>
+          <a:effectRef idx="2">
+            <a:schemeClr val="accent1"/>
+          </a:effectRef>
+          <a:fontRef idx="minor">
+            <a:schemeClr val="lt1"/>
+          </a:fontRef>
+        </p:style>
+        <p:txBody>
+          <a:bodyPr rtlCol="0" anchor="ctr"/>
+          <a:lstStyle/>
+          <a:p>
+            <a:pPr algn="ctr"/>
+          </a:p>
+        </p:txBody>
+      </p:sp>
       <p:pic>
         <p:nvPicPr>
-          <p:cNvPr id="8" name="Picture 7" descr="check_steel.png"/>
+          <p:cNvPr id="9" name="Picture 8" descr="check_white.png"/>
           <p:cNvPicPr>
             <a:picLocks noChangeAspect="1"/>
           </p:cNvPicPr>
@@ -8935,8 +8982,8 @@
         </p:blipFill>
         <p:spPr>
           <a:xfrm>
-            <a:off x="987552" y="2816352"/>
-            <a:ext cx="237744" cy="237744"/>
+            <a:off x="1110447" y="2930103"/>
+            <a:ext cx="266273" cy="266273"/>
           </a:xfrm>
           <a:prstGeom prst="rect">
             <a:avLst/>
@@ -8945,14 +8992,14 @@
       </p:pic>
       <p:sp>
         <p:nvSpPr>
-          <p:cNvPr id="9" name="TextBox 8"/>
+          <p:cNvPr id="10" name="TextBox 9"/>
           <p:cNvSpPr txBox="1"/>
           <p:nvPr/>
         </p:nvSpPr>
         <p:spPr>
           <a:xfrm>
-            <a:off x="1353312" y="2670048"/>
-            <a:ext cx="5029200" cy="530352"/>
+            <a:off x="1627632" y="2670048"/>
+            <a:ext cx="4206240" cy="786384"/>
           </a:xfrm>
           <a:prstGeom prst="rect">
             <a:avLst/>
@@ -8977,7 +9024,7 @@
               </a:spcAft>
             </a:pPr>
             <a:r>
-              <a:rPr sz="1200" b="0">
+              <a:rPr sz="1150" b="0">
                 <a:solidFill>
                   <a:srgbClr val="1A1A1A"/>
                 </a:solidFill>
@@ -8990,18 +9037,18 @@
       </p:sp>
       <p:sp>
         <p:nvSpPr>
-          <p:cNvPr id="10" name="Rounded Rectangle 9"/>
+          <p:cNvPr id="11" name="Rounded Rectangle 10"/>
           <p:cNvSpPr/>
           <p:nvPr/>
         </p:nvSpPr>
         <p:spPr>
           <a:xfrm>
-            <a:off x="841248" y="3273552"/>
-            <a:ext cx="5715000" cy="530352"/>
+            <a:off x="6254496" y="2670048"/>
+            <a:ext cx="5138928" cy="786384"/>
           </a:xfrm>
           <a:prstGeom prst="roundRect">
             <a:avLst>
-              <a:gd name="adj" fmla="val 6000"/>
+              <a:gd name="adj" fmla="val 7000"/>
             </a:avLst>
           </a:prstGeom>
           <a:solidFill>
@@ -9036,9 +9083,55 @@
           </a:p>
         </p:txBody>
       </p:sp>
+      <p:sp>
+        <p:nvSpPr>
+          <p:cNvPr id="12" name="Rounded Rectangle 11"/>
+          <p:cNvSpPr/>
+          <p:nvPr/>
+        </p:nvSpPr>
+        <p:spPr>
+          <a:xfrm>
+            <a:off x="6400800" y="2807208"/>
+            <a:ext cx="512064" cy="512064"/>
+          </a:xfrm>
+          <a:prstGeom prst="roundRect">
+            <a:avLst>
+              <a:gd name="adj" fmla="val 26000"/>
+            </a:avLst>
+          </a:prstGeom>
+          <a:solidFill>
+            <a:srgbClr val="EE0000"/>
+          </a:solidFill>
+          <a:ln>
+            <a:noFill/>
+          </a:ln>
+          <a:effectLst/>
+        </p:spPr>
+        <p:style>
+          <a:lnRef idx="1">
+            <a:schemeClr val="accent1"/>
+          </a:lnRef>
+          <a:fillRef idx="3">
+            <a:schemeClr val="accent1"/>
+          </a:fillRef>
+          <a:effectRef idx="2">
+            <a:schemeClr val="accent1"/>
+          </a:effectRef>
+          <a:fontRef idx="minor">
+            <a:schemeClr val="lt1"/>
+          </a:fontRef>
+        </p:style>
+        <p:txBody>
+          <a:bodyPr rtlCol="0" anchor="ctr"/>
+          <a:lstStyle/>
+          <a:p>
+            <a:pPr algn="ctr"/>
+          </a:p>
+        </p:txBody>
+      </p:sp>
       <p:pic>
         <p:nvPicPr>
-          <p:cNvPr id="11" name="Picture 10" descr="check_steel.png"/>
+          <p:cNvPr id="13" name="Picture 12" descr="check_white.png"/>
           <p:cNvPicPr>
             <a:picLocks noChangeAspect="1"/>
           </p:cNvPicPr>
@@ -9052,8 +9145,8 @@
         </p:blipFill>
         <p:spPr>
           <a:xfrm>
-            <a:off x="987552" y="3419856"/>
-            <a:ext cx="237744" cy="237744"/>
+            <a:off x="6523695" y="2930103"/>
+            <a:ext cx="266273" cy="266273"/>
           </a:xfrm>
           <a:prstGeom prst="rect">
             <a:avLst/>
@@ -9062,14 +9155,14 @@
       </p:pic>
       <p:sp>
         <p:nvSpPr>
-          <p:cNvPr id="12" name="TextBox 11"/>
+          <p:cNvPr id="14" name="TextBox 13"/>
           <p:cNvSpPr txBox="1"/>
           <p:nvPr/>
         </p:nvSpPr>
         <p:spPr>
           <a:xfrm>
-            <a:off x="1353312" y="3273552"/>
-            <a:ext cx="5029200" cy="530352"/>
+            <a:off x="7040880" y="2670048"/>
+            <a:ext cx="4206240" cy="786384"/>
           </a:xfrm>
           <a:prstGeom prst="rect">
             <a:avLst/>
@@ -9094,7 +9187,7 @@
               </a:spcAft>
             </a:pPr>
             <a:r>
-              <a:rPr sz="1200" b="0">
+              <a:rPr sz="1150" b="0">
                 <a:solidFill>
                   <a:srgbClr val="1A1A1A"/>
                 </a:solidFill>
@@ -9107,18 +9200,18 @@
       </p:sp>
       <p:sp>
         <p:nvSpPr>
-          <p:cNvPr id="13" name="Rounded Rectangle 12"/>
+          <p:cNvPr id="15" name="Rounded Rectangle 14"/>
           <p:cNvSpPr/>
           <p:nvPr/>
         </p:nvSpPr>
         <p:spPr>
           <a:xfrm>
-            <a:off x="841248" y="3877056"/>
-            <a:ext cx="5715000" cy="530352"/>
+            <a:off x="841248" y="3602736"/>
+            <a:ext cx="5138928" cy="786384"/>
           </a:xfrm>
           <a:prstGeom prst="roundRect">
             <a:avLst>
-              <a:gd name="adj" fmla="val 6000"/>
+              <a:gd name="adj" fmla="val 7000"/>
             </a:avLst>
           </a:prstGeom>
           <a:solidFill>
@@ -9153,9 +9246,55 @@
           </a:p>
         </p:txBody>
       </p:sp>
+      <p:sp>
+        <p:nvSpPr>
+          <p:cNvPr id="16" name="Rounded Rectangle 15"/>
+          <p:cNvSpPr/>
+          <p:nvPr/>
+        </p:nvSpPr>
+        <p:spPr>
+          <a:xfrm>
+            <a:off x="987552" y="3739896"/>
+            <a:ext cx="512064" cy="512064"/>
+          </a:xfrm>
+          <a:prstGeom prst="roundRect">
+            <a:avLst>
+              <a:gd name="adj" fmla="val 26000"/>
+            </a:avLst>
+          </a:prstGeom>
+          <a:solidFill>
+            <a:srgbClr val="EE0000"/>
+          </a:solidFill>
+          <a:ln>
+            <a:noFill/>
+          </a:ln>
+          <a:effectLst/>
+        </p:spPr>
+        <p:style>
+          <a:lnRef idx="1">
+            <a:schemeClr val="accent1"/>
+          </a:lnRef>
+          <a:fillRef idx="3">
+            <a:schemeClr val="accent1"/>
+          </a:fillRef>
+          <a:effectRef idx="2">
+            <a:schemeClr val="accent1"/>
+          </a:effectRef>
+          <a:fontRef idx="minor">
+            <a:schemeClr val="lt1"/>
+          </a:fontRef>
+        </p:style>
+        <p:txBody>
+          <a:bodyPr rtlCol="0" anchor="ctr"/>
+          <a:lstStyle/>
+          <a:p>
+            <a:pPr algn="ctr"/>
+          </a:p>
+        </p:txBody>
+      </p:sp>
       <p:pic>
         <p:nvPicPr>
-          <p:cNvPr id="14" name="Picture 13" descr="check_steel.png"/>
+          <p:cNvPr id="17" name="Picture 16" descr="check_white.png"/>
           <p:cNvPicPr>
             <a:picLocks noChangeAspect="1"/>
           </p:cNvPicPr>
@@ -9169,8 +9308,8 @@
         </p:blipFill>
         <p:spPr>
           <a:xfrm>
-            <a:off x="987552" y="4023360"/>
-            <a:ext cx="237744" cy="237744"/>
+            <a:off x="1110447" y="3862791"/>
+            <a:ext cx="266273" cy="266273"/>
           </a:xfrm>
           <a:prstGeom prst="rect">
             <a:avLst/>
@@ -9179,14 +9318,14 @@
       </p:pic>
       <p:sp>
         <p:nvSpPr>
-          <p:cNvPr id="15" name="TextBox 14"/>
+          <p:cNvPr id="18" name="TextBox 17"/>
           <p:cNvSpPr txBox="1"/>
           <p:nvPr/>
         </p:nvSpPr>
         <p:spPr>
           <a:xfrm>
-            <a:off x="1353312" y="3877056"/>
-            <a:ext cx="5029200" cy="530352"/>
+            <a:off x="1627632" y="3602736"/>
+            <a:ext cx="4206240" cy="786384"/>
           </a:xfrm>
           <a:prstGeom prst="rect">
             <a:avLst/>
@@ -9211,7 +9350,7 @@
               </a:spcAft>
             </a:pPr>
             <a:r>
-              <a:rPr sz="1200" b="0">
+              <a:rPr sz="1150" b="0">
                 <a:solidFill>
                   <a:srgbClr val="1A1A1A"/>
                 </a:solidFill>
@@ -9224,18 +9363,18 @@
       </p:sp>
       <p:sp>
         <p:nvSpPr>
-          <p:cNvPr id="16" name="Rounded Rectangle 15"/>
+          <p:cNvPr id="19" name="Rounded Rectangle 18"/>
           <p:cNvSpPr/>
           <p:nvPr/>
         </p:nvSpPr>
         <p:spPr>
           <a:xfrm>
-            <a:off x="841248" y="4480560"/>
-            <a:ext cx="5715000" cy="530352"/>
+            <a:off x="6254496" y="3602736"/>
+            <a:ext cx="5138928" cy="786384"/>
           </a:xfrm>
           <a:prstGeom prst="roundRect">
             <a:avLst>
-              <a:gd name="adj" fmla="val 6000"/>
+              <a:gd name="adj" fmla="val 7000"/>
             </a:avLst>
           </a:prstGeom>
           <a:solidFill>
@@ -9270,9 +9409,55 @@
           </a:p>
         </p:txBody>
       </p:sp>
+      <p:sp>
+        <p:nvSpPr>
+          <p:cNvPr id="20" name="Rounded Rectangle 19"/>
+          <p:cNvSpPr/>
+          <p:nvPr/>
+        </p:nvSpPr>
+        <p:spPr>
+          <a:xfrm>
+            <a:off x="6400800" y="3739896"/>
+            <a:ext cx="512064" cy="512064"/>
+          </a:xfrm>
+          <a:prstGeom prst="roundRect">
+            <a:avLst>
+              <a:gd name="adj" fmla="val 26000"/>
+            </a:avLst>
+          </a:prstGeom>
+          <a:solidFill>
+            <a:srgbClr val="EE0000"/>
+          </a:solidFill>
+          <a:ln>
+            <a:noFill/>
+          </a:ln>
+          <a:effectLst/>
+        </p:spPr>
+        <p:style>
+          <a:lnRef idx="1">
+            <a:schemeClr val="accent1"/>
+          </a:lnRef>
+          <a:fillRef idx="3">
+            <a:schemeClr val="accent1"/>
+          </a:fillRef>
+          <a:effectRef idx="2">
+            <a:schemeClr val="accent1"/>
+          </a:effectRef>
+          <a:fontRef idx="minor">
+            <a:schemeClr val="lt1"/>
+          </a:fontRef>
+        </p:style>
+        <p:txBody>
+          <a:bodyPr rtlCol="0" anchor="ctr"/>
+          <a:lstStyle/>
+          <a:p>
+            <a:pPr algn="ctr"/>
+          </a:p>
+        </p:txBody>
+      </p:sp>
       <p:pic>
         <p:nvPicPr>
-          <p:cNvPr id="17" name="Picture 16" descr="check_steel.png"/>
+          <p:cNvPr id="21" name="Picture 20" descr="check_white.png"/>
           <p:cNvPicPr>
             <a:picLocks noChangeAspect="1"/>
           </p:cNvPicPr>
@@ -9286,8 +9471,8 @@
         </p:blipFill>
         <p:spPr>
           <a:xfrm>
-            <a:off x="987552" y="4626864"/>
-            <a:ext cx="237744" cy="237744"/>
+            <a:off x="6523695" y="3862791"/>
+            <a:ext cx="266273" cy="266273"/>
           </a:xfrm>
           <a:prstGeom prst="rect">
             <a:avLst/>
@@ -9296,14 +9481,14 @@
       </p:pic>
       <p:sp>
         <p:nvSpPr>
-          <p:cNvPr id="18" name="TextBox 17"/>
+          <p:cNvPr id="22" name="TextBox 21"/>
           <p:cNvSpPr txBox="1"/>
           <p:nvPr/>
         </p:nvSpPr>
         <p:spPr>
           <a:xfrm>
-            <a:off x="1353312" y="4480560"/>
-            <a:ext cx="5029200" cy="530352"/>
+            <a:off x="7040880" y="3602736"/>
+            <a:ext cx="4206240" cy="786384"/>
           </a:xfrm>
           <a:prstGeom prst="rect">
             <a:avLst/>
@@ -9328,7 +9513,7 @@
               </a:spcAft>
             </a:pPr>
             <a:r>
-              <a:rPr sz="1200" b="0">
+              <a:rPr sz="1150" b="0">
                 <a:solidFill>
                   <a:srgbClr val="1A1A1A"/>
                 </a:solidFill>
@@ -9341,18 +9526,18 @@
       </p:sp>
       <p:sp>
         <p:nvSpPr>
-          <p:cNvPr id="19" name="Rounded Rectangle 18"/>
+          <p:cNvPr id="23" name="Rounded Rectangle 22"/>
           <p:cNvSpPr/>
           <p:nvPr/>
         </p:nvSpPr>
         <p:spPr>
           <a:xfrm>
-            <a:off x="841248" y="5084064"/>
-            <a:ext cx="5715000" cy="530352"/>
+            <a:off x="841248" y="4535424"/>
+            <a:ext cx="5138928" cy="786384"/>
           </a:xfrm>
           <a:prstGeom prst="roundRect">
             <a:avLst>
-              <a:gd name="adj" fmla="val 6000"/>
+              <a:gd name="adj" fmla="val 7000"/>
             </a:avLst>
           </a:prstGeom>
           <a:solidFill>
@@ -9387,9 +9572,55 @@
           </a:p>
         </p:txBody>
       </p:sp>
+      <p:sp>
+        <p:nvSpPr>
+          <p:cNvPr id="24" name="Rounded Rectangle 23"/>
+          <p:cNvSpPr/>
+          <p:nvPr/>
+        </p:nvSpPr>
+        <p:spPr>
+          <a:xfrm>
+            <a:off x="987552" y="4672584"/>
+            <a:ext cx="512064" cy="512064"/>
+          </a:xfrm>
+          <a:prstGeom prst="roundRect">
+            <a:avLst>
+              <a:gd name="adj" fmla="val 26000"/>
+            </a:avLst>
+          </a:prstGeom>
+          <a:solidFill>
+            <a:srgbClr val="EE0000"/>
+          </a:solidFill>
+          <a:ln>
+            <a:noFill/>
+          </a:ln>
+          <a:effectLst/>
+        </p:spPr>
+        <p:style>
+          <a:lnRef idx="1">
+            <a:schemeClr val="accent1"/>
+          </a:lnRef>
+          <a:fillRef idx="3">
+            <a:schemeClr val="accent1"/>
+          </a:fillRef>
+          <a:effectRef idx="2">
+            <a:schemeClr val="accent1"/>
+          </a:effectRef>
+          <a:fontRef idx="minor">
+            <a:schemeClr val="lt1"/>
+          </a:fontRef>
+        </p:style>
+        <p:txBody>
+          <a:bodyPr rtlCol="0" anchor="ctr"/>
+          <a:lstStyle/>
+          <a:p>
+            <a:pPr algn="ctr"/>
+          </a:p>
+        </p:txBody>
+      </p:sp>
       <p:pic>
         <p:nvPicPr>
-          <p:cNvPr id="20" name="Picture 19" descr="check_steel.png"/>
+          <p:cNvPr id="25" name="Picture 24" descr="check_white.png"/>
           <p:cNvPicPr>
             <a:picLocks noChangeAspect="1"/>
           </p:cNvPicPr>
@@ -9403,8 +9634,8 @@
         </p:blipFill>
         <p:spPr>
           <a:xfrm>
-            <a:off x="987552" y="5230368"/>
-            <a:ext cx="237744" cy="237744"/>
+            <a:off x="1110447" y="4795479"/>
+            <a:ext cx="266273" cy="266273"/>
           </a:xfrm>
           <a:prstGeom prst="rect">
             <a:avLst/>
@@ -9413,14 +9644,14 @@
       </p:pic>
       <p:sp>
         <p:nvSpPr>
-          <p:cNvPr id="21" name="TextBox 20"/>
+          <p:cNvPr id="26" name="TextBox 25"/>
           <p:cNvSpPr txBox="1"/>
           <p:nvPr/>
         </p:nvSpPr>
         <p:spPr>
           <a:xfrm>
-            <a:off x="1353312" y="5084064"/>
-            <a:ext cx="5029200" cy="530352"/>
+            <a:off x="1627632" y="4535424"/>
+            <a:ext cx="4206240" cy="786384"/>
           </a:xfrm>
           <a:prstGeom prst="rect">
             <a:avLst/>
@@ -9445,221 +9676,13 @@
               </a:spcAft>
             </a:pPr>
             <a:r>
-              <a:rPr sz="1200" b="0">
+              <a:rPr sz="1150" b="0">
                 <a:solidFill>
                   <a:srgbClr val="1A1A1A"/>
                 </a:solidFill>
                 <a:latin typeface="Red Hat Text"/>
               </a:rPr>
               <a:t>managedFields records the writer: manager = kubernetes-mcp-server — an auditable trail</a:t>
-            </a:r>
-          </a:p>
-        </p:txBody>
-      </p:sp>
-      <p:sp>
-        <p:nvSpPr>
-          <p:cNvPr id="22" name="Rounded Rectangle 21"/>
-          <p:cNvSpPr/>
-          <p:nvPr/>
-        </p:nvSpPr>
-        <p:spPr>
-          <a:xfrm>
-            <a:off x="6812280" y="2670048"/>
-            <a:ext cx="4538167" cy="2944368"/>
-          </a:xfrm>
-          <a:prstGeom prst="roundRect">
-            <a:avLst>
-              <a:gd name="adj" fmla="val 4000"/>
-            </a:avLst>
-          </a:prstGeom>
-          <a:solidFill>
-            <a:srgbClr val="FFFFFF"/>
-          </a:solidFill>
-          <a:ln w="15240">
-            <a:solidFill>
-              <a:srgbClr val="DDE1E6"/>
-            </a:solidFill>
-          </a:ln>
-          <a:effectLst/>
-        </p:spPr>
-        <p:style>
-          <a:lnRef idx="1">
-            <a:schemeClr val="accent1"/>
-          </a:lnRef>
-          <a:fillRef idx="3">
-            <a:schemeClr val="accent1"/>
-          </a:fillRef>
-          <a:effectRef idx="2">
-            <a:schemeClr val="accent1"/>
-          </a:effectRef>
-          <a:fontRef idx="minor">
-            <a:schemeClr val="lt1"/>
-          </a:fontRef>
-        </p:style>
-        <p:txBody>
-          <a:bodyPr rtlCol="0" anchor="ctr"/>
-          <a:lstStyle/>
-          <a:p>
-            <a:pPr algn="ctr"/>
-          </a:p>
-        </p:txBody>
-      </p:sp>
-      <p:sp>
-        <p:nvSpPr>
-          <p:cNvPr id="23" name="Rounded Rectangle 22"/>
-          <p:cNvSpPr/>
-          <p:nvPr/>
-        </p:nvSpPr>
-        <p:spPr>
-          <a:xfrm>
-            <a:off x="7013448" y="2871216"/>
-            <a:ext cx="1298448" cy="310896"/>
-          </a:xfrm>
-          <a:prstGeom prst="roundRect">
-            <a:avLst>
-              <a:gd name="adj" fmla="val 50000"/>
-            </a:avLst>
-          </a:prstGeom>
-          <a:solidFill>
-            <a:srgbClr val="FCECEC"/>
-          </a:solidFill>
-          <a:ln>
-            <a:noFill/>
-          </a:ln>
-          <a:effectLst/>
-        </p:spPr>
-        <p:style>
-          <a:lnRef idx="1">
-            <a:schemeClr val="accent1"/>
-          </a:lnRef>
-          <a:fillRef idx="3">
-            <a:schemeClr val="accent1"/>
-          </a:fillRef>
-          <a:effectRef idx="2">
-            <a:schemeClr val="accent1"/>
-          </a:effectRef>
-          <a:fontRef idx="minor">
-            <a:schemeClr val="lt1"/>
-          </a:fontRef>
-        </p:style>
-        <p:txBody>
-          <a:bodyPr rtlCol="0" anchor="ctr"/>
-          <a:lstStyle/>
-          <a:p>
-            <a:pPr algn="ctr"/>
-          </a:p>
-        </p:txBody>
-      </p:sp>
-      <p:sp>
-        <p:nvSpPr>
-          <p:cNvPr id="24" name="TextBox 23"/>
-          <p:cNvSpPr txBox="1"/>
-          <p:nvPr/>
-        </p:nvSpPr>
-        <p:spPr>
-          <a:xfrm>
-            <a:off x="7013448" y="2871216"/>
-            <a:ext cx="1298448" cy="310896"/>
-          </a:xfrm>
-          <a:prstGeom prst="rect">
-            <a:avLst/>
-          </a:prstGeom>
-          <a:noFill/>
-        </p:spPr>
-        <p:txBody>
-          <a:bodyPr wrap="none" anchor="ctr" lIns="0" rIns="0" tIns="0" bIns="0">
-            <a:spAutoFit/>
-          </a:bodyPr>
-          <a:lstStyle/>
-          <a:p>
-            <a:pPr algn="ctr">
-              <a:lnSpc>
-                <a:spcPct val="106000"/>
-              </a:lnSpc>
-              <a:spcBef>
-                <a:spcPts val="0"/>
-              </a:spcBef>
-              <a:spcAft>
-                <a:spcPts val="0"/>
-              </a:spcAft>
-            </a:pPr>
-            <a:r>
-              <a:rPr sz="850" b="1">
-                <a:solidFill>
-                  <a:srgbClr val="B80000"/>
-                </a:solidFill>
-                <a:latin typeface="Red Hat Display"/>
-              </a:rPr>
-              <a:t>MEDIA PASS</a:t>
-            </a:r>
-          </a:p>
-        </p:txBody>
-      </p:sp>
-      <p:pic>
-        <p:nvPicPr>
-          <p:cNvPr id="25" name="Picture 24" descr="eye_slate.png"/>
-          <p:cNvPicPr>
-            <a:picLocks noChangeAspect="1"/>
-          </p:cNvPicPr>
-          <p:nvPr/>
-        </p:nvPicPr>
-        <p:blipFill>
-          <a:blip r:embed="rId4"/>
-          <a:stretch>
-            <a:fillRect/>
-          </a:stretch>
-        </p:blipFill>
-        <p:spPr>
-          <a:xfrm>
-            <a:off x="8843619" y="3383280"/>
-            <a:ext cx="475488" cy="475488"/>
-          </a:xfrm>
-          <a:prstGeom prst="rect">
-            <a:avLst/>
-          </a:prstGeom>
-        </p:spPr>
-      </p:pic>
-      <p:sp>
-        <p:nvSpPr>
-          <p:cNvPr id="26" name="TextBox 25"/>
-          <p:cNvSpPr txBox="1"/>
-          <p:nvPr/>
-        </p:nvSpPr>
-        <p:spPr>
-          <a:xfrm>
-            <a:off x="7050024" y="3995928"/>
-            <a:ext cx="4062679" cy="1481328"/>
-          </a:xfrm>
-          <a:prstGeom prst="rect">
-            <a:avLst/>
-          </a:prstGeom>
-          <a:noFill/>
-        </p:spPr>
-        <p:txBody>
-          <a:bodyPr wrap="square" anchor="t" lIns="0" rIns="0" tIns="0" bIns="0">
-            <a:spAutoFit/>
-          </a:bodyPr>
-          <a:lstStyle/>
-          <a:p>
-            <a:pPr algn="l">
-              <a:lnSpc>
-                <a:spcPct val="120000"/>
-              </a:lnSpc>
-              <a:spcBef>
-                <a:spcPts val="0"/>
-              </a:spcBef>
-              <a:spcAft>
-                <a:spcPts val="0"/>
-              </a:spcAft>
-            </a:pPr>
-            <a:r>
-              <a:rPr sz="950" b="0">
-                <a:solidFill>
-                  <a:srgbClr val="8A9099"/>
-                </a:solidFill>
-                <a:latin typeface="Red Hat Text"/>
-              </a:rPr>
-              <a:t>A three-panel strip: (1) the deployer Role YAML with "no secrets, no scale" circled; (2) can-i matrix (patch deployments: yes / get secrets: no); (3) parasol-claims 0/1 → 1/1 with a managedFields callout "manager: kubernetes-mcp-server".</a:t>
             </a:r>
           </a:p>
         </p:txBody>
@@ -9967,7 +9990,7 @@
         <p:spPr>
           <a:xfrm>
             <a:off x="841248" y="2395728"/>
-            <a:ext cx="5715000" cy="530352"/>
+            <a:ext cx="4160520" cy="475488"/>
           </a:xfrm>
           <a:prstGeom prst="roundRect">
             <a:avLst>
@@ -10022,8 +10045,8 @@
         </p:blipFill>
         <p:spPr>
           <a:xfrm>
-            <a:off x="987552" y="2542032"/>
-            <a:ext cx="237744" cy="237744"/>
+            <a:off x="969264" y="2532888"/>
+            <a:ext cx="201168" cy="201168"/>
           </a:xfrm>
           <a:prstGeom prst="rect">
             <a:avLst/>
@@ -10038,8 +10061,8 @@
         </p:nvSpPr>
         <p:spPr>
           <a:xfrm>
-            <a:off x="1353312" y="2395728"/>
-            <a:ext cx="5029200" cy="530352"/>
+            <a:off x="1280160" y="2395728"/>
+            <a:ext cx="3593591" cy="475488"/>
           </a:xfrm>
           <a:prstGeom prst="rect">
             <a:avLst/>
@@ -10064,7 +10087,7 @@
               </a:spcAft>
             </a:pPr>
             <a:r>
-              <a:rPr sz="1200" b="0">
+              <a:rPr sz="1050" b="0">
                 <a:solidFill>
                   <a:srgbClr val="1A1A1A"/>
                 </a:solidFill>
@@ -10083,8 +10106,8 @@
         </p:nvSpPr>
         <p:spPr>
           <a:xfrm>
-            <a:off x="841248" y="2999232"/>
-            <a:ext cx="5715000" cy="530352"/>
+            <a:off x="841248" y="2944368"/>
+            <a:ext cx="4160520" cy="475488"/>
           </a:xfrm>
           <a:prstGeom prst="roundRect">
             <a:avLst>
@@ -10139,8 +10162,8 @@
         </p:blipFill>
         <p:spPr>
           <a:xfrm>
-            <a:off x="987552" y="3145536"/>
-            <a:ext cx="237744" cy="237744"/>
+            <a:off x="969264" y="3081528"/>
+            <a:ext cx="201168" cy="201168"/>
           </a:xfrm>
           <a:prstGeom prst="rect">
             <a:avLst/>
@@ -10155,8 +10178,8 @@
         </p:nvSpPr>
         <p:spPr>
           <a:xfrm>
-            <a:off x="1353312" y="2999232"/>
-            <a:ext cx="5029200" cy="530352"/>
+            <a:off x="1280160" y="2944368"/>
+            <a:ext cx="3593591" cy="475488"/>
           </a:xfrm>
           <a:prstGeom prst="rect">
             <a:avLst/>
@@ -10181,7 +10204,7 @@
               </a:spcAft>
             </a:pPr>
             <a:r>
-              <a:rPr sz="1200" b="0">
+              <a:rPr sz="1050" b="0">
                 <a:solidFill>
                   <a:srgbClr val="1A1A1A"/>
                 </a:solidFill>
@@ -10200,8 +10223,8 @@
         </p:nvSpPr>
         <p:spPr>
           <a:xfrm>
-            <a:off x="841248" y="3602736"/>
-            <a:ext cx="5715000" cy="530352"/>
+            <a:off x="841248" y="3493008"/>
+            <a:ext cx="4160520" cy="475488"/>
           </a:xfrm>
           <a:prstGeom prst="roundRect">
             <a:avLst>
@@ -10256,8 +10279,8 @@
         </p:blipFill>
         <p:spPr>
           <a:xfrm>
-            <a:off x="987552" y="3749040"/>
-            <a:ext cx="237744" cy="237744"/>
+            <a:off x="969264" y="3630168"/>
+            <a:ext cx="201168" cy="201168"/>
           </a:xfrm>
           <a:prstGeom prst="rect">
             <a:avLst/>
@@ -10272,8 +10295,8 @@
         </p:nvSpPr>
         <p:spPr>
           <a:xfrm>
-            <a:off x="1353312" y="3602736"/>
-            <a:ext cx="5029200" cy="530352"/>
+            <a:off x="1280160" y="3493008"/>
+            <a:ext cx="3593591" cy="475488"/>
           </a:xfrm>
           <a:prstGeom prst="rect">
             <a:avLst/>
@@ -10298,7 +10321,7 @@
               </a:spcAft>
             </a:pPr>
             <a:r>
-              <a:rPr sz="1200" b="0">
+              <a:rPr sz="1050" b="0">
                 <a:solidFill>
                   <a:srgbClr val="1A1A1A"/>
                 </a:solidFill>
@@ -10317,8 +10340,8 @@
         </p:nvSpPr>
         <p:spPr>
           <a:xfrm>
-            <a:off x="841248" y="4206240"/>
-            <a:ext cx="5715000" cy="530352"/>
+            <a:off x="841248" y="4041648"/>
+            <a:ext cx="4160520" cy="475488"/>
           </a:xfrm>
           <a:prstGeom prst="roundRect">
             <a:avLst>
@@ -10373,8 +10396,8 @@
         </p:blipFill>
         <p:spPr>
           <a:xfrm>
-            <a:off x="987552" y="4352544"/>
-            <a:ext cx="237744" cy="237744"/>
+            <a:off x="969264" y="4178807"/>
+            <a:ext cx="201168" cy="201168"/>
           </a:xfrm>
           <a:prstGeom prst="rect">
             <a:avLst/>
@@ -10389,8 +10412,8 @@
         </p:nvSpPr>
         <p:spPr>
           <a:xfrm>
-            <a:off x="1353312" y="4206240"/>
-            <a:ext cx="5029200" cy="530352"/>
+            <a:off x="1280160" y="4041648"/>
+            <a:ext cx="3593591" cy="475488"/>
           </a:xfrm>
           <a:prstGeom prst="rect">
             <a:avLst/>
@@ -10415,7 +10438,7 @@
               </a:spcAft>
             </a:pPr>
             <a:r>
-              <a:rPr sz="1200" b="0">
+              <a:rPr sz="1050" b="0">
                 <a:solidFill>
                   <a:srgbClr val="1A1A1A"/>
                 </a:solidFill>
@@ -10434,8 +10457,8 @@
         </p:nvSpPr>
         <p:spPr>
           <a:xfrm>
-            <a:off x="841248" y="4809744"/>
-            <a:ext cx="5715000" cy="530352"/>
+            <a:off x="841248" y="4590288"/>
+            <a:ext cx="4160520" cy="475488"/>
           </a:xfrm>
           <a:prstGeom prst="roundRect">
             <a:avLst>
@@ -10490,8 +10513,8 @@
         </p:blipFill>
         <p:spPr>
           <a:xfrm>
-            <a:off x="987552" y="4956048"/>
-            <a:ext cx="237744" cy="237744"/>
+            <a:off x="969264" y="4727447"/>
+            <a:ext cx="201168" cy="201168"/>
           </a:xfrm>
           <a:prstGeom prst="rect">
             <a:avLst/>
@@ -10506,8 +10529,8 @@
         </p:nvSpPr>
         <p:spPr>
           <a:xfrm>
-            <a:off x="1353312" y="4809744"/>
-            <a:ext cx="5029200" cy="530352"/>
+            <a:off x="1280160" y="4590288"/>
+            <a:ext cx="3593591" cy="475488"/>
           </a:xfrm>
           <a:prstGeom prst="rect">
             <a:avLst/>
@@ -10532,7 +10555,7 @@
               </a:spcAft>
             </a:pPr>
             <a:r>
-              <a:rPr sz="1200" b="0">
+              <a:rPr sz="1050" b="0">
                 <a:solidFill>
                   <a:srgbClr val="1A1A1A"/>
                 </a:solidFill>
@@ -10551,8 +10574,8 @@
         </p:nvSpPr>
         <p:spPr>
           <a:xfrm>
-            <a:off x="6812280" y="2395728"/>
-            <a:ext cx="4538167" cy="2944368"/>
+            <a:off x="5385816" y="2395728"/>
+            <a:ext cx="3461523" cy="3657599"/>
           </a:xfrm>
           <a:prstGeom prst="roundRect">
             <a:avLst>
@@ -10591,100 +10614,9 @@
           </a:p>
         </p:txBody>
       </p:sp>
-      <p:sp>
-        <p:nvSpPr>
-          <p:cNvPr id="22" name="Rounded Rectangle 21"/>
-          <p:cNvSpPr/>
-          <p:nvPr/>
-        </p:nvSpPr>
-        <p:spPr>
-          <a:xfrm>
-            <a:off x="7013448" y="2596896"/>
-            <a:ext cx="1298448" cy="310896"/>
-          </a:xfrm>
-          <a:prstGeom prst="roundRect">
-            <a:avLst>
-              <a:gd name="adj" fmla="val 50000"/>
-            </a:avLst>
-          </a:prstGeom>
-          <a:solidFill>
-            <a:srgbClr val="FCECEC"/>
-          </a:solidFill>
-          <a:ln>
-            <a:noFill/>
-          </a:ln>
-          <a:effectLst/>
-        </p:spPr>
-        <p:style>
-          <a:lnRef idx="1">
-            <a:schemeClr val="accent1"/>
-          </a:lnRef>
-          <a:fillRef idx="3">
-            <a:schemeClr val="accent1"/>
-          </a:fillRef>
-          <a:effectRef idx="2">
-            <a:schemeClr val="accent1"/>
-          </a:effectRef>
-          <a:fontRef idx="minor">
-            <a:schemeClr val="lt1"/>
-          </a:fontRef>
-        </p:style>
-        <p:txBody>
-          <a:bodyPr rtlCol="0" anchor="ctr"/>
-          <a:lstStyle/>
-          <a:p>
-            <a:pPr algn="ctr"/>
-          </a:p>
-        </p:txBody>
-      </p:sp>
-      <p:sp>
-        <p:nvSpPr>
-          <p:cNvPr id="23" name="TextBox 22"/>
-          <p:cNvSpPr txBox="1"/>
-          <p:nvPr/>
-        </p:nvSpPr>
-        <p:spPr>
-          <a:xfrm>
-            <a:off x="7013448" y="2596896"/>
-            <a:ext cx="1298448" cy="310896"/>
-          </a:xfrm>
-          <a:prstGeom prst="rect">
-            <a:avLst/>
-          </a:prstGeom>
-          <a:noFill/>
-        </p:spPr>
-        <p:txBody>
-          <a:bodyPr wrap="none" anchor="ctr" lIns="0" rIns="0" tIns="0" bIns="0">
-            <a:spAutoFit/>
-          </a:bodyPr>
-          <a:lstStyle/>
-          <a:p>
-            <a:pPr algn="ctr">
-              <a:lnSpc>
-                <a:spcPct val="106000"/>
-              </a:lnSpc>
-              <a:spcBef>
-                <a:spcPts val="0"/>
-              </a:spcBef>
-              <a:spcAft>
-                <a:spcPts val="0"/>
-              </a:spcAft>
-            </a:pPr>
-            <a:r>
-              <a:rPr sz="850" b="1">
-                <a:solidFill>
-                  <a:srgbClr val="B80000"/>
-                </a:solidFill>
-                <a:latin typeface="Red Hat Display"/>
-              </a:rPr>
-              <a:t>MEDIA PASS</a:t>
-            </a:r>
-          </a:p>
-        </p:txBody>
-      </p:sp>
       <p:pic>
         <p:nvPicPr>
-          <p:cNvPr id="24" name="Picture 23" descr="eye_slate.png"/>
+          <p:cNvPr id="22" name="Picture 21" descr="02-two-phase-rbac.png"/>
           <p:cNvPicPr>
             <a:picLocks noChangeAspect="1"/>
           </p:cNvPicPr>
@@ -10698,62 +10630,17 @@
         </p:blipFill>
         <p:spPr>
           <a:xfrm>
-            <a:off x="8843619" y="3108960"/>
-            <a:ext cx="475488" cy="475488"/>
+            <a:off x="5532120" y="2542032"/>
+            <a:ext cx="3168915" cy="3364991"/>
           </a:xfrm>
           <a:prstGeom prst="rect">
             <a:avLst/>
           </a:prstGeom>
         </p:spPr>
       </p:pic>
-      <p:sp>
-        <p:nvSpPr>
-          <p:cNvPr id="25" name="TextBox 24"/>
-          <p:cNvSpPr txBox="1"/>
-          <p:nvPr/>
-        </p:nvSpPr>
-        <p:spPr>
-          <a:xfrm>
-            <a:off x="7050024" y="3721608"/>
-            <a:ext cx="4062679" cy="1481328"/>
-          </a:xfrm>
-          <a:prstGeom prst="rect">
-            <a:avLst/>
-          </a:prstGeom>
-          <a:noFill/>
-        </p:spPr>
-        <p:txBody>
-          <a:bodyPr wrap="square" anchor="t" lIns="0" rIns="0" tIns="0" bIns="0">
-            <a:spAutoFit/>
-          </a:bodyPr>
-          <a:lstStyle/>
-          <a:p>
-            <a:pPr algn="l">
-              <a:lnSpc>
-                <a:spcPct val="120000"/>
-              </a:lnSpc>
-              <a:spcBef>
-                <a:spcPts val="0"/>
-              </a:spcBef>
-              <a:spcAft>
-                <a:spcPts val="0"/>
-              </a:spcAft>
-            </a:pPr>
-            <a:r>
-              <a:rPr sz="950" b="0">
-                <a:solidFill>
-                  <a:srgbClr val="8A9099"/>
-                </a:solidFill>
-                <a:latin typeface="Red Hat Text"/>
-              </a:rPr>
-              <a:t>Reuse concept diagram ai-assisted-development-...-02-two-phase-rbac.svg, zoomed on the denial branch: the agent's call to user1-dev bouncing off a red RBAC wall labeled "403 — no binding here", with the can-i matrix (yes/no/no) beside it.</a:t>
-            </a:r>
-          </a:p>
-        </p:txBody>
-      </p:sp>
       <p:cxnSp>
         <p:nvCxnSpPr>
-          <p:cNvPr id="26" name="Connector 25"/>
+          <p:cNvPr id="23" name="Connector 22"/>
           <p:cNvCxnSpPr/>
           <p:nvPr/>
         </p:nvCxnSpPr>
@@ -10789,7 +10676,7 @@
       </p:cxnSp>
       <p:sp>
         <p:nvSpPr>
-          <p:cNvPr id="27" name="TextBox 26"/>
+          <p:cNvPr id="24" name="TextBox 23"/>
           <p:cNvSpPr txBox="1"/>
           <p:nvPr/>
         </p:nvSpPr>
@@ -10834,7 +10721,7 @@
       </p:sp>
       <p:sp>
         <p:nvSpPr>
-          <p:cNvPr id="28" name="TextBox 27"/>
+          <p:cNvPr id="25" name="TextBox 24"/>
           <p:cNvSpPr txBox="1"/>
           <p:nvPr/>
         </p:nvSpPr>
@@ -11099,11 +10986,11 @@
         <p:spPr>
           <a:xfrm>
             <a:off x="841248" y="2670048"/>
-            <a:ext cx="5715000" cy="530352"/>
+            <a:ext cx="5138928" cy="786384"/>
           </a:xfrm>
           <a:prstGeom prst="roundRect">
             <a:avLst>
-              <a:gd name="adj" fmla="val 6000"/>
+              <a:gd name="adj" fmla="val 7000"/>
             </a:avLst>
           </a:prstGeom>
           <a:solidFill>
@@ -11138,9 +11025,55 @@
           </a:p>
         </p:txBody>
       </p:sp>
+      <p:sp>
+        <p:nvSpPr>
+          <p:cNvPr id="8" name="Rounded Rectangle 7"/>
+          <p:cNvSpPr/>
+          <p:nvPr/>
+        </p:nvSpPr>
+        <p:spPr>
+          <a:xfrm>
+            <a:off x="987552" y="2807208"/>
+            <a:ext cx="512064" cy="512064"/>
+          </a:xfrm>
+          <a:prstGeom prst="roundRect">
+            <a:avLst>
+              <a:gd name="adj" fmla="val 26000"/>
+            </a:avLst>
+          </a:prstGeom>
+          <a:solidFill>
+            <a:srgbClr val="EE0000"/>
+          </a:solidFill>
+          <a:ln>
+            <a:noFill/>
+          </a:ln>
+          <a:effectLst/>
+        </p:spPr>
+        <p:style>
+          <a:lnRef idx="1">
+            <a:schemeClr val="accent1"/>
+          </a:lnRef>
+          <a:fillRef idx="3">
+            <a:schemeClr val="accent1"/>
+          </a:fillRef>
+          <a:effectRef idx="2">
+            <a:schemeClr val="accent1"/>
+          </a:effectRef>
+          <a:fontRef idx="minor">
+            <a:schemeClr val="lt1"/>
+          </a:fontRef>
+        </p:style>
+        <p:txBody>
+          <a:bodyPr rtlCol="0" anchor="ctr"/>
+          <a:lstStyle/>
+          <a:p>
+            <a:pPr algn="ctr"/>
+          </a:p>
+        </p:txBody>
+      </p:sp>
       <p:pic>
         <p:nvPicPr>
-          <p:cNvPr id="8" name="Picture 7" descr="check_steel.png"/>
+          <p:cNvPr id="9" name="Picture 8" descr="check_white.png"/>
           <p:cNvPicPr>
             <a:picLocks noChangeAspect="1"/>
           </p:cNvPicPr>
@@ -11154,8 +11087,8 @@
         </p:blipFill>
         <p:spPr>
           <a:xfrm>
-            <a:off x="987552" y="2816352"/>
-            <a:ext cx="237744" cy="237744"/>
+            <a:off x="1110447" y="2930103"/>
+            <a:ext cx="266273" cy="266273"/>
           </a:xfrm>
           <a:prstGeom prst="rect">
             <a:avLst/>
@@ -11164,14 +11097,14 @@
       </p:pic>
       <p:sp>
         <p:nvSpPr>
-          <p:cNvPr id="9" name="TextBox 8"/>
+          <p:cNvPr id="10" name="TextBox 9"/>
           <p:cNvSpPr txBox="1"/>
           <p:nvPr/>
         </p:nvSpPr>
         <p:spPr>
           <a:xfrm>
-            <a:off x="1353312" y="2670048"/>
-            <a:ext cx="5029200" cy="530352"/>
+            <a:off x="1627632" y="2670048"/>
+            <a:ext cx="4206240" cy="786384"/>
           </a:xfrm>
           <a:prstGeom prst="rect">
             <a:avLst/>
@@ -11196,7 +11129,7 @@
               </a:spcAft>
             </a:pPr>
             <a:r>
-              <a:rPr sz="1200" b="0">
+              <a:rPr sz="1150" b="0">
                 <a:solidFill>
                   <a:srgbClr val="1A1A1A"/>
                 </a:solidFill>
@@ -11209,18 +11142,18 @@
       </p:sp>
       <p:sp>
         <p:nvSpPr>
-          <p:cNvPr id="10" name="Rounded Rectangle 9"/>
+          <p:cNvPr id="11" name="Rounded Rectangle 10"/>
           <p:cNvSpPr/>
           <p:nvPr/>
         </p:nvSpPr>
         <p:spPr>
           <a:xfrm>
-            <a:off x="841248" y="3273552"/>
-            <a:ext cx="5715000" cy="530352"/>
+            <a:off x="6254496" y="2670048"/>
+            <a:ext cx="5138928" cy="786384"/>
           </a:xfrm>
           <a:prstGeom prst="roundRect">
             <a:avLst>
-              <a:gd name="adj" fmla="val 6000"/>
+              <a:gd name="adj" fmla="val 7000"/>
             </a:avLst>
           </a:prstGeom>
           <a:solidFill>
@@ -11255,9 +11188,55 @@
           </a:p>
         </p:txBody>
       </p:sp>
+      <p:sp>
+        <p:nvSpPr>
+          <p:cNvPr id="12" name="Rounded Rectangle 11"/>
+          <p:cNvSpPr/>
+          <p:nvPr/>
+        </p:nvSpPr>
+        <p:spPr>
+          <a:xfrm>
+            <a:off x="6400800" y="2807208"/>
+            <a:ext cx="512064" cy="512064"/>
+          </a:xfrm>
+          <a:prstGeom prst="roundRect">
+            <a:avLst>
+              <a:gd name="adj" fmla="val 26000"/>
+            </a:avLst>
+          </a:prstGeom>
+          <a:solidFill>
+            <a:srgbClr val="EE0000"/>
+          </a:solidFill>
+          <a:ln>
+            <a:noFill/>
+          </a:ln>
+          <a:effectLst/>
+        </p:spPr>
+        <p:style>
+          <a:lnRef idx="1">
+            <a:schemeClr val="accent1"/>
+          </a:lnRef>
+          <a:fillRef idx="3">
+            <a:schemeClr val="accent1"/>
+          </a:fillRef>
+          <a:effectRef idx="2">
+            <a:schemeClr val="accent1"/>
+          </a:effectRef>
+          <a:fontRef idx="minor">
+            <a:schemeClr val="lt1"/>
+          </a:fontRef>
+        </p:style>
+        <p:txBody>
+          <a:bodyPr rtlCol="0" anchor="ctr"/>
+          <a:lstStyle/>
+          <a:p>
+            <a:pPr algn="ctr"/>
+          </a:p>
+        </p:txBody>
+      </p:sp>
       <p:pic>
         <p:nvPicPr>
-          <p:cNvPr id="11" name="Picture 10" descr="check_steel.png"/>
+          <p:cNvPr id="13" name="Picture 12" descr="check_white.png"/>
           <p:cNvPicPr>
             <a:picLocks noChangeAspect="1"/>
           </p:cNvPicPr>
@@ -11271,8 +11250,8 @@
         </p:blipFill>
         <p:spPr>
           <a:xfrm>
-            <a:off x="987552" y="3419856"/>
-            <a:ext cx="237744" cy="237744"/>
+            <a:off x="6523695" y="2930103"/>
+            <a:ext cx="266273" cy="266273"/>
           </a:xfrm>
           <a:prstGeom prst="rect">
             <a:avLst/>
@@ -11281,14 +11260,14 @@
       </p:pic>
       <p:sp>
         <p:nvSpPr>
-          <p:cNvPr id="12" name="TextBox 11"/>
+          <p:cNvPr id="14" name="TextBox 13"/>
           <p:cNvSpPr txBox="1"/>
           <p:nvPr/>
         </p:nvSpPr>
         <p:spPr>
           <a:xfrm>
-            <a:off x="1353312" y="3273552"/>
-            <a:ext cx="5029200" cy="530352"/>
+            <a:off x="7040880" y="2670048"/>
+            <a:ext cx="4206240" cy="786384"/>
           </a:xfrm>
           <a:prstGeom prst="rect">
             <a:avLst/>
@@ -11313,7 +11292,7 @@
               </a:spcAft>
             </a:pPr>
             <a:r>
-              <a:rPr sz="1200" b="0">
+              <a:rPr sz="1150" b="0">
                 <a:solidFill>
                   <a:srgbClr val="1A1A1A"/>
                 </a:solidFill>
@@ -11326,18 +11305,18 @@
       </p:sp>
       <p:sp>
         <p:nvSpPr>
-          <p:cNvPr id="13" name="Rounded Rectangle 12"/>
+          <p:cNvPr id="15" name="Rounded Rectangle 14"/>
           <p:cNvSpPr/>
           <p:nvPr/>
         </p:nvSpPr>
         <p:spPr>
           <a:xfrm>
-            <a:off x="841248" y="3877056"/>
-            <a:ext cx="5715000" cy="530352"/>
+            <a:off x="841248" y="3602736"/>
+            <a:ext cx="5138928" cy="786384"/>
           </a:xfrm>
           <a:prstGeom prst="roundRect">
             <a:avLst>
-              <a:gd name="adj" fmla="val 6000"/>
+              <a:gd name="adj" fmla="val 7000"/>
             </a:avLst>
           </a:prstGeom>
           <a:solidFill>
@@ -11372,9 +11351,55 @@
           </a:p>
         </p:txBody>
       </p:sp>
+      <p:sp>
+        <p:nvSpPr>
+          <p:cNvPr id="16" name="Rounded Rectangle 15"/>
+          <p:cNvSpPr/>
+          <p:nvPr/>
+        </p:nvSpPr>
+        <p:spPr>
+          <a:xfrm>
+            <a:off x="987552" y="3739896"/>
+            <a:ext cx="512064" cy="512064"/>
+          </a:xfrm>
+          <a:prstGeom prst="roundRect">
+            <a:avLst>
+              <a:gd name="adj" fmla="val 26000"/>
+            </a:avLst>
+          </a:prstGeom>
+          <a:solidFill>
+            <a:srgbClr val="EE0000"/>
+          </a:solidFill>
+          <a:ln>
+            <a:noFill/>
+          </a:ln>
+          <a:effectLst/>
+        </p:spPr>
+        <p:style>
+          <a:lnRef idx="1">
+            <a:schemeClr val="accent1"/>
+          </a:lnRef>
+          <a:fillRef idx="3">
+            <a:schemeClr val="accent1"/>
+          </a:fillRef>
+          <a:effectRef idx="2">
+            <a:schemeClr val="accent1"/>
+          </a:effectRef>
+          <a:fontRef idx="minor">
+            <a:schemeClr val="lt1"/>
+          </a:fontRef>
+        </p:style>
+        <p:txBody>
+          <a:bodyPr rtlCol="0" anchor="ctr"/>
+          <a:lstStyle/>
+          <a:p>
+            <a:pPr algn="ctr"/>
+          </a:p>
+        </p:txBody>
+      </p:sp>
       <p:pic>
         <p:nvPicPr>
-          <p:cNvPr id="14" name="Picture 13" descr="check_steel.png"/>
+          <p:cNvPr id="17" name="Picture 16" descr="check_white.png"/>
           <p:cNvPicPr>
             <a:picLocks noChangeAspect="1"/>
           </p:cNvPicPr>
@@ -11388,8 +11413,8 @@
         </p:blipFill>
         <p:spPr>
           <a:xfrm>
-            <a:off x="987552" y="4023360"/>
-            <a:ext cx="237744" cy="237744"/>
+            <a:off x="1110447" y="3862791"/>
+            <a:ext cx="266273" cy="266273"/>
           </a:xfrm>
           <a:prstGeom prst="rect">
             <a:avLst/>
@@ -11398,14 +11423,14 @@
       </p:pic>
       <p:sp>
         <p:nvSpPr>
-          <p:cNvPr id="15" name="TextBox 14"/>
+          <p:cNvPr id="18" name="TextBox 17"/>
           <p:cNvSpPr txBox="1"/>
           <p:nvPr/>
         </p:nvSpPr>
         <p:spPr>
           <a:xfrm>
-            <a:off x="1353312" y="3877056"/>
-            <a:ext cx="5029200" cy="530352"/>
+            <a:off x="1627632" y="3602736"/>
+            <a:ext cx="4206240" cy="786384"/>
           </a:xfrm>
           <a:prstGeom prst="rect">
             <a:avLst/>
@@ -11430,7 +11455,7 @@
               </a:spcAft>
             </a:pPr>
             <a:r>
-              <a:rPr sz="1200" b="0">
+              <a:rPr sz="1150" b="0">
                 <a:solidFill>
                   <a:srgbClr val="1A1A1A"/>
                 </a:solidFill>
@@ -11443,18 +11468,18 @@
       </p:sp>
       <p:sp>
         <p:nvSpPr>
-          <p:cNvPr id="16" name="Rounded Rectangle 15"/>
+          <p:cNvPr id="19" name="Rounded Rectangle 18"/>
           <p:cNvSpPr/>
           <p:nvPr/>
         </p:nvSpPr>
         <p:spPr>
           <a:xfrm>
-            <a:off x="841248" y="4480560"/>
-            <a:ext cx="5715000" cy="530352"/>
+            <a:off x="6254496" y="3602736"/>
+            <a:ext cx="5138928" cy="786384"/>
           </a:xfrm>
           <a:prstGeom prst="roundRect">
             <a:avLst>
-              <a:gd name="adj" fmla="val 6000"/>
+              <a:gd name="adj" fmla="val 7000"/>
             </a:avLst>
           </a:prstGeom>
           <a:solidFill>
@@ -11489,9 +11514,55 @@
           </a:p>
         </p:txBody>
       </p:sp>
+      <p:sp>
+        <p:nvSpPr>
+          <p:cNvPr id="20" name="Rounded Rectangle 19"/>
+          <p:cNvSpPr/>
+          <p:nvPr/>
+        </p:nvSpPr>
+        <p:spPr>
+          <a:xfrm>
+            <a:off x="6400800" y="3739896"/>
+            <a:ext cx="512064" cy="512064"/>
+          </a:xfrm>
+          <a:prstGeom prst="roundRect">
+            <a:avLst>
+              <a:gd name="adj" fmla="val 26000"/>
+            </a:avLst>
+          </a:prstGeom>
+          <a:solidFill>
+            <a:srgbClr val="EE0000"/>
+          </a:solidFill>
+          <a:ln>
+            <a:noFill/>
+          </a:ln>
+          <a:effectLst/>
+        </p:spPr>
+        <p:style>
+          <a:lnRef idx="1">
+            <a:schemeClr val="accent1"/>
+          </a:lnRef>
+          <a:fillRef idx="3">
+            <a:schemeClr val="accent1"/>
+          </a:fillRef>
+          <a:effectRef idx="2">
+            <a:schemeClr val="accent1"/>
+          </a:effectRef>
+          <a:fontRef idx="minor">
+            <a:schemeClr val="lt1"/>
+          </a:fontRef>
+        </p:style>
+        <p:txBody>
+          <a:bodyPr rtlCol="0" anchor="ctr"/>
+          <a:lstStyle/>
+          <a:p>
+            <a:pPr algn="ctr"/>
+          </a:p>
+        </p:txBody>
+      </p:sp>
       <p:pic>
         <p:nvPicPr>
-          <p:cNvPr id="17" name="Picture 16" descr="check_steel.png"/>
+          <p:cNvPr id="21" name="Picture 20" descr="check_white.png"/>
           <p:cNvPicPr>
             <a:picLocks noChangeAspect="1"/>
           </p:cNvPicPr>
@@ -11505,8 +11576,8 @@
         </p:blipFill>
         <p:spPr>
           <a:xfrm>
-            <a:off x="987552" y="4626864"/>
-            <a:ext cx="237744" cy="237744"/>
+            <a:off x="6523695" y="3862791"/>
+            <a:ext cx="266273" cy="266273"/>
           </a:xfrm>
           <a:prstGeom prst="rect">
             <a:avLst/>
@@ -11515,14 +11586,14 @@
       </p:pic>
       <p:sp>
         <p:nvSpPr>
-          <p:cNvPr id="18" name="TextBox 17"/>
+          <p:cNvPr id="22" name="TextBox 21"/>
           <p:cNvSpPr txBox="1"/>
           <p:nvPr/>
         </p:nvSpPr>
         <p:spPr>
           <a:xfrm>
-            <a:off x="1353312" y="4480560"/>
-            <a:ext cx="5029200" cy="530352"/>
+            <a:off x="7040880" y="3602736"/>
+            <a:ext cx="4206240" cy="786384"/>
           </a:xfrm>
           <a:prstGeom prst="rect">
             <a:avLst/>
@@ -11547,7 +11618,7 @@
               </a:spcAft>
             </a:pPr>
             <a:r>
-              <a:rPr sz="1200" b="0">
+              <a:rPr sz="1150" b="0">
                 <a:solidFill>
                   <a:srgbClr val="1A1A1A"/>
                 </a:solidFill>
@@ -11560,18 +11631,18 @@
       </p:sp>
       <p:sp>
         <p:nvSpPr>
-          <p:cNvPr id="19" name="Rounded Rectangle 18"/>
+          <p:cNvPr id="23" name="Rounded Rectangle 22"/>
           <p:cNvSpPr/>
           <p:nvPr/>
         </p:nvSpPr>
         <p:spPr>
           <a:xfrm>
-            <a:off x="841248" y="5084064"/>
-            <a:ext cx="5715000" cy="530352"/>
+            <a:off x="841248" y="4535424"/>
+            <a:ext cx="5138928" cy="786384"/>
           </a:xfrm>
           <a:prstGeom prst="roundRect">
             <a:avLst>
-              <a:gd name="adj" fmla="val 6000"/>
+              <a:gd name="adj" fmla="val 7000"/>
             </a:avLst>
           </a:prstGeom>
           <a:solidFill>
@@ -11606,9 +11677,55 @@
           </a:p>
         </p:txBody>
       </p:sp>
+      <p:sp>
+        <p:nvSpPr>
+          <p:cNvPr id="24" name="Rounded Rectangle 23"/>
+          <p:cNvSpPr/>
+          <p:nvPr/>
+        </p:nvSpPr>
+        <p:spPr>
+          <a:xfrm>
+            <a:off x="987552" y="4672584"/>
+            <a:ext cx="512064" cy="512064"/>
+          </a:xfrm>
+          <a:prstGeom prst="roundRect">
+            <a:avLst>
+              <a:gd name="adj" fmla="val 26000"/>
+            </a:avLst>
+          </a:prstGeom>
+          <a:solidFill>
+            <a:srgbClr val="EE0000"/>
+          </a:solidFill>
+          <a:ln>
+            <a:noFill/>
+          </a:ln>
+          <a:effectLst/>
+        </p:spPr>
+        <p:style>
+          <a:lnRef idx="1">
+            <a:schemeClr val="accent1"/>
+          </a:lnRef>
+          <a:fillRef idx="3">
+            <a:schemeClr val="accent1"/>
+          </a:fillRef>
+          <a:effectRef idx="2">
+            <a:schemeClr val="accent1"/>
+          </a:effectRef>
+          <a:fontRef idx="minor">
+            <a:schemeClr val="lt1"/>
+          </a:fontRef>
+        </p:style>
+        <p:txBody>
+          <a:bodyPr rtlCol="0" anchor="ctr"/>
+          <a:lstStyle/>
+          <a:p>
+            <a:pPr algn="ctr"/>
+          </a:p>
+        </p:txBody>
+      </p:sp>
       <p:pic>
         <p:nvPicPr>
-          <p:cNvPr id="20" name="Picture 19" descr="check_steel.png"/>
+          <p:cNvPr id="25" name="Picture 24" descr="check_white.png"/>
           <p:cNvPicPr>
             <a:picLocks noChangeAspect="1"/>
           </p:cNvPicPr>
@@ -11622,8 +11739,8 @@
         </p:blipFill>
         <p:spPr>
           <a:xfrm>
-            <a:off x="987552" y="5230368"/>
-            <a:ext cx="237744" cy="237744"/>
+            <a:off x="1110447" y="4795479"/>
+            <a:ext cx="266273" cy="266273"/>
           </a:xfrm>
           <a:prstGeom prst="rect">
             <a:avLst/>
@@ -11632,14 +11749,14 @@
       </p:pic>
       <p:sp>
         <p:nvSpPr>
-          <p:cNvPr id="21" name="TextBox 20"/>
+          <p:cNvPr id="26" name="TextBox 25"/>
           <p:cNvSpPr txBox="1"/>
           <p:nvPr/>
         </p:nvSpPr>
         <p:spPr>
           <a:xfrm>
-            <a:off x="1353312" y="5084064"/>
-            <a:ext cx="5029200" cy="530352"/>
+            <a:off x="1627632" y="4535424"/>
+            <a:ext cx="4206240" cy="786384"/>
           </a:xfrm>
           <a:prstGeom prst="rect">
             <a:avLst/>
@@ -11664,7 +11781,7 @@
               </a:spcAft>
             </a:pPr>
             <a:r>
-              <a:rPr sz="1200" b="0">
+              <a:rPr sz="1150" b="0">
                 <a:solidFill>
                   <a:srgbClr val="1A1A1A"/>
                 </a:solidFill>
@@ -11675,16 +11792,310 @@
           </a:p>
         </p:txBody>
       </p:sp>
-      <p:sp>
-        <p:nvSpPr>
-          <p:cNvPr id="22" name="Rounded Rectangle 21"/>
+      <p:cxnSp>
+        <p:nvCxnSpPr>
+          <p:cNvPr id="27" name="Connector 26"/>
+          <p:cNvCxnSpPr/>
+          <p:nvPr/>
+        </p:nvCxnSpPr>
+        <p:spPr>
+          <a:xfrm>
+            <a:off x="841248" y="6437376"/>
+            <a:ext cx="10509199" cy="0"/>
+          </a:xfrm>
+          <a:prstGeom prst="bentConnector3">
+            <a:avLst/>
+          </a:prstGeom>
+          <a:ln w="12700">
+            <a:solidFill>
+              <a:srgbClr val="DDE1E6"/>
+            </a:solidFill>
+          </a:ln>
+          <a:effectLst/>
+        </p:spPr>
+        <p:style>
+          <a:lnRef idx="2">
+            <a:schemeClr val="accent1"/>
+          </a:lnRef>
+          <a:fillRef idx="0">
+            <a:schemeClr val="accent1"/>
+          </a:fillRef>
+          <a:effectRef idx="1">
+            <a:schemeClr val="accent1"/>
+          </a:effectRef>
+          <a:fontRef idx="minor">
+            <a:schemeClr val="tx1"/>
+          </a:fontRef>
+        </p:style>
+      </p:cxnSp>
+      <p:sp>
+        <p:nvSpPr>
+          <p:cNvPr id="28" name="TextBox 27"/>
+          <p:cNvSpPr txBox="1"/>
+          <p:nvPr/>
+        </p:nvSpPr>
+        <p:spPr>
+          <a:xfrm>
+            <a:off x="841248" y="6473952"/>
+            <a:ext cx="7315200" cy="274320"/>
+          </a:xfrm>
+          <a:prstGeom prst="rect">
+            <a:avLst/>
+          </a:prstGeom>
+          <a:noFill/>
+        </p:spPr>
+        <p:txBody>
+          <a:bodyPr wrap="square" anchor="t" lIns="0" rIns="0" tIns="0" bIns="0">
+            <a:spAutoFit/>
+          </a:bodyPr>
+          <a:lstStyle/>
+          <a:p>
+            <a:pPr algn="l">
+              <a:lnSpc>
+                <a:spcPct val="106000"/>
+              </a:lnSpc>
+              <a:spcBef>
+                <a:spcPts val="0"/>
+              </a:spcBef>
+              <a:spcAft>
+                <a:spcPts val="0"/>
+              </a:spcAft>
+            </a:pPr>
+            <a:r>
+              <a:rPr sz="950" b="0">
+                <a:solidFill>
+                  <a:srgbClr val="8A9099"/>
+                </a:solidFill>
+                <a:latin typeface="Red Hat Text"/>
+              </a:rPr>
+              <a:t>CONFIDENTIAL</a:t>
+            </a:r>
+          </a:p>
+        </p:txBody>
+      </p:sp>
+      <p:sp>
+        <p:nvSpPr>
+          <p:cNvPr id="29" name="TextBox 28"/>
+          <p:cNvSpPr txBox="1"/>
+          <p:nvPr/>
+        </p:nvSpPr>
+        <p:spPr>
+          <a:xfrm>
+            <a:off x="10801807" y="6473952"/>
+            <a:ext cx="548640" cy="274320"/>
+          </a:xfrm>
+          <a:prstGeom prst="rect">
+            <a:avLst/>
+          </a:prstGeom>
+          <a:noFill/>
+        </p:spPr>
+        <p:txBody>
+          <a:bodyPr wrap="square" anchor="t" lIns="0" rIns="0" tIns="0" bIns="0">
+            <a:spAutoFit/>
+          </a:bodyPr>
+          <a:lstStyle/>
+          <a:p>
+            <a:pPr algn="r">
+              <a:lnSpc>
+                <a:spcPct val="106000"/>
+              </a:lnSpc>
+              <a:spcBef>
+                <a:spcPts val="0"/>
+              </a:spcBef>
+              <a:spcAft>
+                <a:spcPts val="0"/>
+              </a:spcAft>
+            </a:pPr>
+            <a:r>
+              <a:rPr sz="950" b="0">
+                <a:solidFill>
+                  <a:srgbClr val="8A9099"/>
+                </a:solidFill>
+                <a:latin typeface="Red Hat Text"/>
+              </a:rPr>
+              <a:t>7</a:t>
+            </a:r>
+          </a:p>
+        </p:txBody>
+      </p:sp>
+    </p:spTree>
+  </p:cSld>
+  <p:clrMapOvr>
+    <a:masterClrMapping/>
+  </p:clrMapOvr>
+</p:sld>
+</file>
+
+<file path=ppt/slides/slide9.xml><?xml version="1.0" encoding="utf-8"?>
+<p:sld xmlns:a="http://schemas.openxmlformats.org/drawingml/2006/main" xmlns:p="http://schemas.openxmlformats.org/presentationml/2006/main" xmlns:r="http://schemas.openxmlformats.org/officeDocument/2006/relationships">
+  <p:cSld>
+    <p:spTree>
+      <p:nvGrpSpPr>
+        <p:cNvPr id="1" name=""/>
+        <p:cNvGrpSpPr/>
+        <p:nvPr/>
+      </p:nvGrpSpPr>
+      <p:grpSpPr/>
+      <p:pic>
+        <p:nvPicPr>
+          <p:cNvPr id="2" name="Picture 1" descr="redhat_logo.jpg"/>
+          <p:cNvPicPr>
+            <a:picLocks noChangeAspect="1"/>
+          </p:cNvPicPr>
+          <p:nvPr/>
+        </p:nvPicPr>
+        <p:blipFill>
+          <a:blip r:embed="rId2"/>
+          <a:stretch>
+            <a:fillRect/>
+          </a:stretch>
+        </p:blipFill>
+        <p:spPr>
+          <a:xfrm>
+            <a:off x="10326319" y="475488"/>
+            <a:ext cx="1024128" cy="242248"/>
+          </a:xfrm>
+          <a:prstGeom prst="rect">
+            <a:avLst/>
+          </a:prstGeom>
+        </p:spPr>
+      </p:pic>
+      <p:sp>
+        <p:nvSpPr>
+          <p:cNvPr id="3" name="TextBox 2"/>
+          <p:cNvSpPr txBox="1"/>
+          <p:nvPr/>
+        </p:nvSpPr>
+        <p:spPr>
+          <a:xfrm>
+            <a:off x="841248" y="548640"/>
+            <a:ext cx="8595360" cy="274320"/>
+          </a:xfrm>
+          <a:prstGeom prst="rect">
+            <a:avLst/>
+          </a:prstGeom>
+          <a:noFill/>
+        </p:spPr>
+        <p:txBody>
+          <a:bodyPr wrap="square" anchor="t" lIns="0" rIns="0" tIns="0" bIns="0">
+            <a:spAutoFit/>
+          </a:bodyPr>
+          <a:lstStyle/>
+          <a:p>
+            <a:pPr algn="l">
+              <a:lnSpc>
+                <a:spcPct val="106000"/>
+              </a:lnSpc>
+              <a:spcBef>
+                <a:spcPts val="0"/>
+              </a:spcBef>
+              <a:spcAft>
+                <a:spcPts val="0"/>
+              </a:spcAft>
+            </a:pPr>
+            <a:r>
+              <a:rPr sz="1250" b="1" spc="220">
+                <a:solidFill>
+                  <a:srgbClr val="EE0000"/>
+                </a:solidFill>
+                <a:latin typeface="Red Hat Display"/>
+              </a:rPr>
+              <a:t>M25 · AI-ASSISTED DEVELOPMENT ON OPENSHIFT</a:t>
+            </a:r>
+          </a:p>
+        </p:txBody>
+      </p:sp>
+      <p:sp>
+        <p:nvSpPr>
+          <p:cNvPr id="4" name="TextBox 3"/>
+          <p:cNvSpPr txBox="1"/>
+          <p:nvPr/>
+        </p:nvSpPr>
+        <p:spPr>
+          <a:xfrm>
+            <a:off x="841248" y="877824"/>
+            <a:ext cx="10515600" cy="548640"/>
+          </a:xfrm>
+          <a:prstGeom prst="rect">
+            <a:avLst/>
+          </a:prstGeom>
+          <a:noFill/>
+        </p:spPr>
+        <p:txBody>
+          <a:bodyPr wrap="none" anchor="t" lIns="0" rIns="0" tIns="0" bIns="0">
+            <a:spAutoFit/>
+          </a:bodyPr>
+          <a:lstStyle/>
+          <a:p>
+            <a:pPr algn="l">
+              <a:lnSpc>
+                <a:spcPct val="100000"/>
+              </a:lnSpc>
+              <a:spcBef>
+                <a:spcPts val="0"/>
+              </a:spcBef>
+              <a:spcAft>
+                <a:spcPts val="0"/>
+              </a:spcAft>
+            </a:pPr>
+            <a:r>
+              <a:rPr sz="2500" b="1">
+                <a:solidFill>
+                  <a:srgbClr val="1A1A1A"/>
+                </a:solidFill>
+                <a:latin typeface="Red Hat Display"/>
+              </a:rPr>
+              <a:t>What you built</a:t>
+            </a:r>
+          </a:p>
+        </p:txBody>
+      </p:sp>
+      <p:cxnSp>
+        <p:nvCxnSpPr>
+          <p:cNvPr id="5" name="Connector 4"/>
+          <p:cNvCxnSpPr/>
+          <p:nvPr/>
+        </p:nvCxnSpPr>
+        <p:spPr>
+          <a:xfrm>
+            <a:off x="841248" y="1554480"/>
+            <a:ext cx="1371600" cy="0"/>
+          </a:xfrm>
+          <a:prstGeom prst="bentConnector3">
+            <a:avLst/>
+          </a:prstGeom>
+          <a:ln w="31750">
+            <a:solidFill>
+              <a:srgbClr val="EE0000"/>
+            </a:solidFill>
+          </a:ln>
+          <a:effectLst/>
+        </p:spPr>
+        <p:style>
+          <a:lnRef idx="2">
+            <a:schemeClr val="accent1"/>
+          </a:lnRef>
+          <a:fillRef idx="0">
+            <a:schemeClr val="accent1"/>
+          </a:fillRef>
+          <a:effectRef idx="1">
+            <a:schemeClr val="accent1"/>
+          </a:effectRef>
+          <a:fontRef idx="minor">
+            <a:schemeClr val="tx1"/>
+          </a:fontRef>
+        </p:style>
+      </p:cxnSp>
+      <p:sp>
+        <p:nvSpPr>
+          <p:cNvPr id="6" name="Rounded Rectangle 5"/>
           <p:cNvSpPr/>
           <p:nvPr/>
         </p:nvSpPr>
         <p:spPr>
           <a:xfrm>
-            <a:off x="6812280" y="2670048"/>
-            <a:ext cx="4538167" cy="2944368"/>
+            <a:off x="841248" y="2331720"/>
+            <a:ext cx="10509199" cy="3794760"/>
           </a:xfrm>
           <a:prstGeom prst="roundRect">
             <a:avLst>
@@ -11723,169 +12134,33 @@
           </a:p>
         </p:txBody>
       </p:sp>
-      <p:sp>
-        <p:nvSpPr>
-          <p:cNvPr id="23" name="Rounded Rectangle 22"/>
-          <p:cNvSpPr/>
-          <p:nvPr/>
-        </p:nvSpPr>
-        <p:spPr>
-          <a:xfrm>
-            <a:off x="7013448" y="2871216"/>
-            <a:ext cx="1298448" cy="310896"/>
-          </a:xfrm>
-          <a:prstGeom prst="roundRect">
-            <a:avLst>
-              <a:gd name="adj" fmla="val 50000"/>
-            </a:avLst>
-          </a:prstGeom>
-          <a:solidFill>
-            <a:srgbClr val="FCECEC"/>
-          </a:solidFill>
-          <a:ln>
-            <a:noFill/>
-          </a:ln>
-          <a:effectLst/>
-        </p:spPr>
-        <p:style>
-          <a:lnRef idx="1">
-            <a:schemeClr val="accent1"/>
-          </a:lnRef>
-          <a:fillRef idx="3">
-            <a:schemeClr val="accent1"/>
-          </a:fillRef>
-          <a:effectRef idx="2">
-            <a:schemeClr val="accent1"/>
-          </a:effectRef>
-          <a:fontRef idx="minor">
-            <a:schemeClr val="lt1"/>
-          </a:fontRef>
-        </p:style>
-        <p:txBody>
-          <a:bodyPr rtlCol="0" anchor="ctr"/>
-          <a:lstStyle/>
-          <a:p>
-            <a:pPr algn="ctr"/>
-          </a:p>
-        </p:txBody>
-      </p:sp>
-      <p:sp>
-        <p:nvSpPr>
-          <p:cNvPr id="24" name="TextBox 23"/>
-          <p:cNvSpPr txBox="1"/>
-          <p:nvPr/>
-        </p:nvSpPr>
-        <p:spPr>
-          <a:xfrm>
-            <a:off x="7013448" y="2871216"/>
-            <a:ext cx="1298448" cy="310896"/>
-          </a:xfrm>
-          <a:prstGeom prst="rect">
-            <a:avLst/>
-          </a:prstGeom>
-          <a:noFill/>
-        </p:spPr>
-        <p:txBody>
-          <a:bodyPr wrap="none" anchor="ctr" lIns="0" rIns="0" tIns="0" bIns="0">
-            <a:spAutoFit/>
-          </a:bodyPr>
-          <a:lstStyle/>
-          <a:p>
-            <a:pPr algn="ctr">
-              <a:lnSpc>
-                <a:spcPct val="106000"/>
-              </a:lnSpc>
-              <a:spcBef>
-                <a:spcPts val="0"/>
-              </a:spcBef>
-              <a:spcAft>
-                <a:spcPts val="0"/>
-              </a:spcAft>
-            </a:pPr>
-            <a:r>
-              <a:rPr sz="850" b="1">
-                <a:solidFill>
-                  <a:srgbClr val="B80000"/>
-                </a:solidFill>
-                <a:latin typeface="Red Hat Display"/>
-              </a:rPr>
-              <a:t>MEDIA PASS</a:t>
-            </a:r>
-          </a:p>
-        </p:txBody>
-      </p:sp>
       <p:pic>
         <p:nvPicPr>
-          <p:cNvPr id="25" name="Picture 24" descr="eye_slate.png"/>
+          <p:cNvPr id="7" name="Picture 6" descr="03-what-you-built.png"/>
           <p:cNvPicPr>
             <a:picLocks noChangeAspect="1"/>
           </p:cNvPicPr>
           <p:nvPr/>
         </p:nvPicPr>
         <p:blipFill>
-          <a:blip r:embed="rId4"/>
+          <a:blip r:embed="rId3"/>
           <a:stretch>
             <a:fillRect/>
           </a:stretch>
         </p:blipFill>
         <p:spPr>
           <a:xfrm>
-            <a:off x="8843619" y="3383280"/>
-            <a:ext cx="475488" cy="475488"/>
+            <a:off x="1042416" y="3692172"/>
+            <a:ext cx="10106863" cy="1073854"/>
           </a:xfrm>
           <a:prstGeom prst="rect">
             <a:avLst/>
           </a:prstGeom>
         </p:spPr>
       </p:pic>
-      <p:sp>
-        <p:nvSpPr>
-          <p:cNvPr id="26" name="TextBox 25"/>
-          <p:cNvSpPr txBox="1"/>
-          <p:nvPr/>
-        </p:nvSpPr>
-        <p:spPr>
-          <a:xfrm>
-            <a:off x="7050024" y="3995928"/>
-            <a:ext cx="4062679" cy="1481328"/>
-          </a:xfrm>
-          <a:prstGeom prst="rect">
-            <a:avLst/>
-          </a:prstGeom>
-          <a:noFill/>
-        </p:spPr>
-        <p:txBody>
-          <a:bodyPr wrap="square" anchor="t" lIns="0" rIns="0" tIns="0" bIns="0">
-            <a:spAutoFit/>
-          </a:bodyPr>
-          <a:lstStyle/>
-          <a:p>
-            <a:pPr algn="l">
-              <a:lnSpc>
-                <a:spcPct val="120000"/>
-              </a:lnSpc>
-              <a:spcBef>
-                <a:spcPts val="0"/>
-              </a:spcBef>
-              <a:spcAft>
-                <a:spcPts val="0"/>
-              </a:spcAft>
-            </a:pPr>
-            <a:r>
-              <a:rPr sz="950" b="0">
-                <a:solidFill>
-                  <a:srgbClr val="8A9099"/>
-                </a:solidFill>
-                <a:latin typeface="Red Hat Text"/>
-              </a:rPr>
-              <a:t>A checklist card (the 8-line team policy) on the right; on the left, three small product tiles (OpenShift Lightspeed / Dev Lightspeed for RHDH / for MTA) all funneling into one shared "RBAC-governed ServiceAccount" base. Footer: "scope it with RBAC, not trust."</a:t>
-            </a:r>
-          </a:p>
-        </p:txBody>
-      </p:sp>
       <p:cxnSp>
         <p:nvCxnSpPr>
-          <p:cNvPr id="27" name="Connector 26"/>
+          <p:cNvPr id="8" name="Connector 7"/>
           <p:cNvCxnSpPr/>
           <p:nvPr/>
         </p:nvCxnSpPr>
@@ -11921,7 +12196,7 @@
       </p:cxnSp>
       <p:sp>
         <p:nvSpPr>
-          <p:cNvPr id="28" name="TextBox 27"/>
+          <p:cNvPr id="9" name="TextBox 8"/>
           <p:cNvSpPr txBox="1"/>
           <p:nvPr/>
         </p:nvSpPr>
@@ -11966,7 +12241,7 @@
       </p:sp>
       <p:sp>
         <p:nvSpPr>
-          <p:cNvPr id="29" name="TextBox 28"/>
+          <p:cNvPr id="10" name="TextBox 9"/>
           <p:cNvSpPr txBox="1"/>
           <p:nvPr/>
         </p:nvSpPr>
@@ -12004,7 +12279,7 @@
                 </a:solidFill>
                 <a:latin typeface="Red Hat Text"/>
               </a:rPr>
-              <a:t>7</a:t>
+              <a:t>8</a:t>
             </a:r>
           </a:p>
         </p:txBody>
